--- a/01R/03_ggplot2_intro.pptx
+++ b/01R/03_ggplot2_intro.pptx
@@ -6,7 +6,10 @@
   </p:sldMasterIdLst>
   <p:sldIdLst>
     <p:sldId id="256" r:id="rId2"/>
-    <p:sldId id="257" r:id="rId3"/>
+    <p:sldId id="258" r:id="rId3"/>
+    <p:sldId id="259" r:id="rId4"/>
+    <p:sldId id="260" r:id="rId5"/>
+    <p:sldId id="257" r:id="rId6"/>
   </p:sldIdLst>
   <p:sldSz cx="12192000" cy="6858000"/>
   <p:notesSz cx="6858000" cy="9144000"/>
@@ -3460,6 +3463,265 @@
           <p:cNvPr id="2" name="Titre 1">
             <a:extLst>
               <a:ext uri="{FF2B5EF4-FFF2-40B4-BE49-F238E27FC236}">
+                <a16:creationId xmlns:a16="http://schemas.microsoft.com/office/drawing/2014/main" id="{19D85796-4529-5C68-700B-DF1A8AAF5F19}"/>
+              </a:ext>
+            </a:extLst>
+          </p:cNvPr>
+          <p:cNvSpPr>
+            <a:spLocks noGrp="1"/>
+          </p:cNvSpPr>
+          <p:nvPr>
+            <p:ph type="title"/>
+          </p:nvPr>
+        </p:nvSpPr>
+        <p:spPr/>
+        <p:txBody>
+          <a:bodyPr/>
+          <a:lstStyle/>
+          <a:p>
+            <a:r>
+              <a:rPr lang="fr-FR" dirty="0" err="1"/>
+              <a:t>Cheatsheet</a:t>
+            </a:r>
+            <a:endParaRPr lang="fr-FR" dirty="0"/>
+          </a:p>
+        </p:txBody>
+      </p:sp>
+      <p:sp>
+        <p:nvSpPr>
+          <p:cNvPr id="3" name="Espace réservé du texte 2">
+            <a:extLst>
+              <a:ext uri="{FF2B5EF4-FFF2-40B4-BE49-F238E27FC236}">
+                <a16:creationId xmlns:a16="http://schemas.microsoft.com/office/drawing/2014/main" id="{4821E2D5-9697-395A-63A7-E012399EA2B3}"/>
+              </a:ext>
+            </a:extLst>
+          </p:cNvPr>
+          <p:cNvSpPr>
+            <a:spLocks noGrp="1"/>
+          </p:cNvSpPr>
+          <p:nvPr>
+            <p:ph type="body" idx="1"/>
+          </p:nvPr>
+        </p:nvSpPr>
+        <p:spPr/>
+        <p:txBody>
+          <a:bodyPr/>
+          <a:lstStyle/>
+          <a:p>
+            <a:r>
+              <a:rPr lang="fr-FR" dirty="0"/>
+              <a:t>data-</a:t>
+            </a:r>
+            <a:r>
+              <a:rPr lang="fr-FR" dirty="0" err="1"/>
+              <a:t>visualization.pdf</a:t>
+            </a:r>
+            <a:endParaRPr lang="fr-FR" dirty="0"/>
+          </a:p>
+        </p:txBody>
+      </p:sp>
+      <p:pic>
+        <p:nvPicPr>
+          <p:cNvPr id="1026" name="Picture 2" descr="Data visualization with ggplot2 :: Cheat Sheet">
+            <a:extLst>
+              <a:ext uri="{FF2B5EF4-FFF2-40B4-BE49-F238E27FC236}">
+                <a16:creationId xmlns:a16="http://schemas.microsoft.com/office/drawing/2014/main" id="{ED6A8114-E995-844B-F7AA-E897E10696B3}"/>
+              </a:ext>
+            </a:extLst>
+          </p:cNvPr>
+          <p:cNvPicPr>
+            <a:picLocks noChangeAspect="1" noChangeArrowheads="1"/>
+          </p:cNvPicPr>
+          <p:nvPr/>
+        </p:nvPicPr>
+        <p:blipFill>
+          <a:blip r:embed="rId2">
+            <a:extLst>
+              <a:ext uri="{28A0092B-C50C-407E-A947-70E740481C1C}">
+                <a14:useLocalDpi xmlns:a14="http://schemas.microsoft.com/office/drawing/2010/main" val="0"/>
+              </a:ext>
+            </a:extLst>
+          </a:blip>
+          <a:srcRect/>
+          <a:stretch>
+            <a:fillRect/>
+          </a:stretch>
+        </p:blipFill>
+        <p:spPr bwMode="auto">
+          <a:xfrm>
+            <a:off x="10151983" y="768350"/>
+            <a:ext cx="1208167" cy="1394426"/>
+          </a:xfrm>
+          <a:prstGeom prst="rect">
+            <a:avLst/>
+          </a:prstGeom>
+          <a:noFill/>
+          <a:extLst>
+            <a:ext uri="{909E8E84-426E-40DD-AFC4-6F175D3DCCD1}">
+              <a14:hiddenFill xmlns:a14="http://schemas.microsoft.com/office/drawing/2010/main">
+                <a:solidFill>
+                  <a:srgbClr val="FFFFFF"/>
+                </a:solidFill>
+              </a14:hiddenFill>
+            </a:ext>
+          </a:extLst>
+        </p:spPr>
+      </p:pic>
+    </p:spTree>
+    <p:extLst>
+      <p:ext uri="{BB962C8B-B14F-4D97-AF65-F5344CB8AC3E}">
+        <p14:creationId xmlns:p14="http://schemas.microsoft.com/office/powerpoint/2010/main" val="1731562383"/>
+      </p:ext>
+    </p:extLst>
+  </p:cSld>
+  <p:clrMapOvr>
+    <a:masterClrMapping/>
+  </p:clrMapOvr>
+</p:sld>
+</file>
+
+<file path=ppt/slides/slide3.xml><?xml version="1.0" encoding="utf-8"?>
+<p:sld xmlns:a="http://schemas.openxmlformats.org/drawingml/2006/main" xmlns:r="http://schemas.openxmlformats.org/officeDocument/2006/relationships" xmlns:p="http://schemas.openxmlformats.org/presentationml/2006/main">
+  <p:cSld>
+    <p:spTree>
+      <p:nvGrpSpPr>
+        <p:cNvPr id="1" name=""/>
+        <p:cNvGrpSpPr/>
+        <p:nvPr/>
+      </p:nvGrpSpPr>
+      <p:grpSpPr>
+        <a:xfrm>
+          <a:off x="0" y="0"/>
+          <a:ext cx="0" cy="0"/>
+          <a:chOff x="0" y="0"/>
+          <a:chExt cx="0" cy="0"/>
+        </a:xfrm>
+      </p:grpSpPr>
+      <p:pic>
+        <p:nvPicPr>
+          <p:cNvPr id="2" name="Image 1">
+            <a:extLst>
+              <a:ext uri="{FF2B5EF4-FFF2-40B4-BE49-F238E27FC236}">
+                <a16:creationId xmlns:a16="http://schemas.microsoft.com/office/drawing/2014/main" id="{A12D53F5-53EA-0A45-5EFA-081E9229CDC7}"/>
+              </a:ext>
+            </a:extLst>
+          </p:cNvPr>
+          <p:cNvPicPr>
+            <a:picLocks noChangeAspect="1"/>
+          </p:cNvPicPr>
+          <p:nvPr/>
+        </p:nvPicPr>
+        <p:blipFill>
+          <a:blip r:embed="rId2"/>
+          <a:stretch>
+            <a:fillRect/>
+          </a:stretch>
+        </p:blipFill>
+        <p:spPr>
+          <a:xfrm>
+            <a:off x="1652716" y="0"/>
+            <a:ext cx="8886568" cy="6859469"/>
+          </a:xfrm>
+          <a:prstGeom prst="rect">
+            <a:avLst/>
+          </a:prstGeom>
+        </p:spPr>
+      </p:pic>
+    </p:spTree>
+    <p:extLst>
+      <p:ext uri="{BB962C8B-B14F-4D97-AF65-F5344CB8AC3E}">
+        <p14:creationId xmlns:p14="http://schemas.microsoft.com/office/powerpoint/2010/main" val="3525357043"/>
+      </p:ext>
+    </p:extLst>
+  </p:cSld>
+  <p:clrMapOvr>
+    <a:masterClrMapping/>
+  </p:clrMapOvr>
+</p:sld>
+</file>
+
+<file path=ppt/slides/slide4.xml><?xml version="1.0" encoding="utf-8"?>
+<p:sld xmlns:a="http://schemas.openxmlformats.org/drawingml/2006/main" xmlns:r="http://schemas.openxmlformats.org/officeDocument/2006/relationships" xmlns:p="http://schemas.openxmlformats.org/presentationml/2006/main">
+  <p:cSld>
+    <p:spTree>
+      <p:nvGrpSpPr>
+        <p:cNvPr id="1" name=""/>
+        <p:cNvGrpSpPr/>
+        <p:nvPr/>
+      </p:nvGrpSpPr>
+      <p:grpSpPr>
+        <a:xfrm>
+          <a:off x="0" y="0"/>
+          <a:ext cx="0" cy="0"/>
+          <a:chOff x="0" y="0"/>
+          <a:chExt cx="0" cy="0"/>
+        </a:xfrm>
+      </p:grpSpPr>
+      <p:pic>
+        <p:nvPicPr>
+          <p:cNvPr id="2" name="Image 1">
+            <a:extLst>
+              <a:ext uri="{FF2B5EF4-FFF2-40B4-BE49-F238E27FC236}">
+                <a16:creationId xmlns:a16="http://schemas.microsoft.com/office/drawing/2014/main" id="{470CB008-190E-545C-3601-50FDAECF5774}"/>
+              </a:ext>
+            </a:extLst>
+          </p:cNvPr>
+          <p:cNvPicPr>
+            <a:picLocks noChangeAspect="1"/>
+          </p:cNvPicPr>
+          <p:nvPr/>
+        </p:nvPicPr>
+        <p:blipFill>
+          <a:blip r:embed="rId2"/>
+          <a:stretch>
+            <a:fillRect/>
+          </a:stretch>
+        </p:blipFill>
+        <p:spPr>
+          <a:xfrm>
+            <a:off x="1658894" y="5883"/>
+            <a:ext cx="8874211" cy="6852117"/>
+          </a:xfrm>
+          <a:prstGeom prst="rect">
+            <a:avLst/>
+          </a:prstGeom>
+        </p:spPr>
+      </p:pic>
+    </p:spTree>
+    <p:extLst>
+      <p:ext uri="{BB962C8B-B14F-4D97-AF65-F5344CB8AC3E}">
+        <p14:creationId xmlns:p14="http://schemas.microsoft.com/office/powerpoint/2010/main" val="2980129227"/>
+      </p:ext>
+    </p:extLst>
+  </p:cSld>
+  <p:clrMapOvr>
+    <a:masterClrMapping/>
+  </p:clrMapOvr>
+</p:sld>
+</file>
+
+<file path=ppt/slides/slide5.xml><?xml version="1.0" encoding="utf-8"?>
+<p:sld xmlns:a="http://schemas.openxmlformats.org/drawingml/2006/main" xmlns:r="http://schemas.openxmlformats.org/officeDocument/2006/relationships" xmlns:p="http://schemas.openxmlformats.org/presentationml/2006/main">
+  <p:cSld>
+    <p:spTree>
+      <p:nvGrpSpPr>
+        <p:cNvPr id="1" name=""/>
+        <p:cNvGrpSpPr/>
+        <p:nvPr/>
+      </p:nvGrpSpPr>
+      <p:grpSpPr>
+        <a:xfrm>
+          <a:off x="0" y="0"/>
+          <a:ext cx="0" cy="0"/>
+          <a:chOff x="0" y="0"/>
+          <a:chExt cx="0" cy="0"/>
+        </a:xfrm>
+      </p:grpSpPr>
+      <p:sp>
+        <p:nvSpPr>
+          <p:cNvPr id="2" name="Titre 1">
+            <a:extLst>
+              <a:ext uri="{FF2B5EF4-FFF2-40B4-BE49-F238E27FC236}">
                 <a16:creationId xmlns:a16="http://schemas.microsoft.com/office/drawing/2014/main" id="{5978A548-EBC5-5C35-B789-BC3DE60F5467}"/>
               </a:ext>
             </a:extLst>
@@ -3476,7 +3738,27 @@
           <a:bodyPr/>
           <a:lstStyle/>
           <a:p>
-            <a:endParaRPr lang="fr-FR"/>
+            <a:r>
+              <a:rPr lang="fr-FR" dirty="0" err="1"/>
+              <a:t>Barplot</a:t>
+            </a:r>
+            <a:r>
+              <a:rPr lang="fr-FR" dirty="0"/>
+              <a:t> of the </a:t>
+            </a:r>
+            <a:r>
+              <a:rPr lang="fr-FR" dirty="0" err="1"/>
+              <a:t>number</a:t>
+            </a:r>
+            <a:r>
+              <a:rPr lang="fr-FR" dirty="0"/>
+              <a:t> of observations per </a:t>
+            </a:r>
+            <a:r>
+              <a:rPr lang="fr-FR" dirty="0" err="1"/>
+              <a:t>subjects</a:t>
+            </a:r>
+            <a:endParaRPr lang="fr-FR" dirty="0"/>
           </a:p>
         </p:txBody>
       </p:sp>

--- a/01R/03_ggplot2_intro.pptx
+++ b/01R/03_ggplot2_intro.pptx
@@ -9,7 +9,18 @@
     <p:sldId id="258" r:id="rId3"/>
     <p:sldId id="259" r:id="rId4"/>
     <p:sldId id="260" r:id="rId5"/>
-    <p:sldId id="257" r:id="rId6"/>
+    <p:sldId id="261" r:id="rId6"/>
+    <p:sldId id="262" r:id="rId7"/>
+    <p:sldId id="263" r:id="rId8"/>
+    <p:sldId id="264" r:id="rId9"/>
+    <p:sldId id="267" r:id="rId10"/>
+    <p:sldId id="268" r:id="rId11"/>
+    <p:sldId id="269" r:id="rId12"/>
+    <p:sldId id="266" r:id="rId13"/>
+    <p:sldId id="265" r:id="rId14"/>
+    <p:sldId id="270" r:id="rId15"/>
+    <p:sldId id="271" r:id="rId16"/>
+    <p:sldId id="272" r:id="rId17"/>
   </p:sldIdLst>
   <p:sldSz cx="12192000" cy="6858000"/>
   <p:notesSz cx="6858000" cy="9144000"/>
@@ -108,6 +119,11 @@
       </a:defRPr>
     </a:lvl9pPr>
   </p:defaultTextStyle>
+  <p:extLst>
+    <p:ext uri="{EFAFB233-063F-42B5-8137-9DF3F51BA10A}">
+      <p15:sldGuideLst xmlns:p15="http://schemas.microsoft.com/office/powerpoint/2012/main"/>
+    </p:ext>
+  </p:extLst>
 </p:presentation>
 </file>
 
@@ -258,7 +274,7 @@
           <a:p>
             <a:fld id="{022C377B-A7B9-3145-8762-6AFC267F785D}" type="datetimeFigureOut">
               <a:rPr lang="fr-FR" smtClean="0"/>
-              <a:t>27/05/2025</a:t>
+              <a:t>01/06/2025</a:t>
             </a:fld>
             <a:endParaRPr lang="fr-FR"/>
           </a:p>
@@ -456,7 +472,7 @@
           <a:p>
             <a:fld id="{022C377B-A7B9-3145-8762-6AFC267F785D}" type="datetimeFigureOut">
               <a:rPr lang="fr-FR" smtClean="0"/>
-              <a:t>27/05/2025</a:t>
+              <a:t>01/06/2025</a:t>
             </a:fld>
             <a:endParaRPr lang="fr-FR"/>
           </a:p>
@@ -664,7 +680,7 @@
           <a:p>
             <a:fld id="{022C377B-A7B9-3145-8762-6AFC267F785D}" type="datetimeFigureOut">
               <a:rPr lang="fr-FR" smtClean="0"/>
-              <a:t>27/05/2025</a:t>
+              <a:t>01/06/2025</a:t>
             </a:fld>
             <a:endParaRPr lang="fr-FR"/>
           </a:p>
@@ -862,7 +878,7 @@
           <a:p>
             <a:fld id="{022C377B-A7B9-3145-8762-6AFC267F785D}" type="datetimeFigureOut">
               <a:rPr lang="fr-FR" smtClean="0"/>
-              <a:t>27/05/2025</a:t>
+              <a:t>01/06/2025</a:t>
             </a:fld>
             <a:endParaRPr lang="fr-FR"/>
           </a:p>
@@ -1137,7 +1153,7 @@
           <a:p>
             <a:fld id="{022C377B-A7B9-3145-8762-6AFC267F785D}" type="datetimeFigureOut">
               <a:rPr lang="fr-FR" smtClean="0"/>
-              <a:t>27/05/2025</a:t>
+              <a:t>01/06/2025</a:t>
             </a:fld>
             <a:endParaRPr lang="fr-FR"/>
           </a:p>
@@ -1402,7 +1418,7 @@
           <a:p>
             <a:fld id="{022C377B-A7B9-3145-8762-6AFC267F785D}" type="datetimeFigureOut">
               <a:rPr lang="fr-FR" smtClean="0"/>
-              <a:t>27/05/2025</a:t>
+              <a:t>01/06/2025</a:t>
             </a:fld>
             <a:endParaRPr lang="fr-FR"/>
           </a:p>
@@ -1814,7 +1830,7 @@
           <a:p>
             <a:fld id="{022C377B-A7B9-3145-8762-6AFC267F785D}" type="datetimeFigureOut">
               <a:rPr lang="fr-FR" smtClean="0"/>
-              <a:t>27/05/2025</a:t>
+              <a:t>01/06/2025</a:t>
             </a:fld>
             <a:endParaRPr lang="fr-FR"/>
           </a:p>
@@ -1955,7 +1971,7 @@
           <a:p>
             <a:fld id="{022C377B-A7B9-3145-8762-6AFC267F785D}" type="datetimeFigureOut">
               <a:rPr lang="fr-FR" smtClean="0"/>
-              <a:t>27/05/2025</a:t>
+              <a:t>01/06/2025</a:t>
             </a:fld>
             <a:endParaRPr lang="fr-FR"/>
           </a:p>
@@ -2068,7 +2084,7 @@
           <a:p>
             <a:fld id="{022C377B-A7B9-3145-8762-6AFC267F785D}" type="datetimeFigureOut">
               <a:rPr lang="fr-FR" smtClean="0"/>
-              <a:t>27/05/2025</a:t>
+              <a:t>01/06/2025</a:t>
             </a:fld>
             <a:endParaRPr lang="fr-FR"/>
           </a:p>
@@ -2379,7 +2395,7 @@
           <a:p>
             <a:fld id="{022C377B-A7B9-3145-8762-6AFC267F785D}" type="datetimeFigureOut">
               <a:rPr lang="fr-FR" smtClean="0"/>
-              <a:t>27/05/2025</a:t>
+              <a:t>01/06/2025</a:t>
             </a:fld>
             <a:endParaRPr lang="fr-FR"/>
           </a:p>
@@ -2667,7 +2683,7 @@
           <a:p>
             <a:fld id="{022C377B-A7B9-3145-8762-6AFC267F785D}" type="datetimeFigureOut">
               <a:rPr lang="fr-FR" smtClean="0"/>
-              <a:t>27/05/2025</a:t>
+              <a:t>01/06/2025</a:t>
             </a:fld>
             <a:endParaRPr lang="fr-FR"/>
           </a:p>
@@ -2908,7 +2924,7 @@
           <a:p>
             <a:fld id="{022C377B-A7B9-3145-8762-6AFC267F785D}" type="datetimeFigureOut">
               <a:rPr lang="fr-FR" smtClean="0"/>
-              <a:t>27/05/2025</a:t>
+              <a:t>01/06/2025</a:t>
             </a:fld>
             <a:endParaRPr lang="fr-FR"/>
           </a:p>
@@ -3441,6 +3457,1632 @@
 </p:sld>
 </file>
 
+<file path=ppt/slides/slide10.xml><?xml version="1.0" encoding="utf-8"?>
+<p:sld xmlns:a="http://schemas.openxmlformats.org/drawingml/2006/main" xmlns:r="http://schemas.openxmlformats.org/officeDocument/2006/relationships" xmlns:p="http://schemas.openxmlformats.org/presentationml/2006/main">
+  <p:cSld>
+    <p:spTree>
+      <p:nvGrpSpPr>
+        <p:cNvPr id="1" name=""/>
+        <p:cNvGrpSpPr/>
+        <p:nvPr/>
+      </p:nvGrpSpPr>
+      <p:grpSpPr>
+        <a:xfrm>
+          <a:off x="0" y="0"/>
+          <a:ext cx="0" cy="0"/>
+          <a:chOff x="0" y="0"/>
+          <a:chExt cx="0" cy="0"/>
+        </a:xfrm>
+      </p:grpSpPr>
+      <p:sp>
+        <p:nvSpPr>
+          <p:cNvPr id="2" name="Titre 1">
+            <a:extLst>
+              <a:ext uri="{FF2B5EF4-FFF2-40B4-BE49-F238E27FC236}">
+                <a16:creationId xmlns:a16="http://schemas.microsoft.com/office/drawing/2014/main" id="{4F8C28B0-B1C3-BE16-1728-A7CA7931388D}"/>
+              </a:ext>
+            </a:extLst>
+          </p:cNvPr>
+          <p:cNvSpPr>
+            <a:spLocks noGrp="1"/>
+          </p:cNvSpPr>
+          <p:nvPr>
+            <p:ph type="title"/>
+          </p:nvPr>
+        </p:nvSpPr>
+        <p:spPr/>
+        <p:txBody>
+          <a:bodyPr/>
+          <a:lstStyle/>
+          <a:p>
+            <a:r>
+              <a:rPr lang="fr-FR" dirty="0"/>
+              <a:t>[G]</a:t>
+            </a:r>
+            <a:r>
+              <a:rPr lang="fr-FR" dirty="0" err="1"/>
+              <a:t>rammar</a:t>
+            </a:r>
+            <a:r>
+              <a:rPr lang="fr-FR" dirty="0"/>
+              <a:t> of [G]</a:t>
+            </a:r>
+            <a:r>
+              <a:rPr lang="fr-FR" dirty="0" err="1"/>
+              <a:t>raphics</a:t>
+            </a:r>
+            <a:endParaRPr lang="fr-FR" dirty="0"/>
+          </a:p>
+        </p:txBody>
+      </p:sp>
+      <p:pic>
+        <p:nvPicPr>
+          <p:cNvPr id="5" name="Espace réservé du contenu 4">
+            <a:extLst>
+              <a:ext uri="{FF2B5EF4-FFF2-40B4-BE49-F238E27FC236}">
+                <a16:creationId xmlns:a16="http://schemas.microsoft.com/office/drawing/2014/main" id="{BBBD7390-6983-4285-E652-E86D9D3CE502}"/>
+              </a:ext>
+            </a:extLst>
+          </p:cNvPr>
+          <p:cNvPicPr>
+            <a:picLocks noGrp="1" noChangeAspect="1"/>
+          </p:cNvPicPr>
+          <p:nvPr>
+            <p:ph idx="1"/>
+          </p:nvPr>
+        </p:nvPicPr>
+        <p:blipFill>
+          <a:blip r:embed="rId2"/>
+          <a:stretch>
+            <a:fillRect/>
+          </a:stretch>
+        </p:blipFill>
+        <p:spPr>
+          <a:xfrm>
+            <a:off x="1320800" y="2407444"/>
+            <a:ext cx="9550400" cy="3187700"/>
+          </a:xfrm>
+        </p:spPr>
+      </p:pic>
+    </p:spTree>
+    <p:extLst>
+      <p:ext uri="{BB962C8B-B14F-4D97-AF65-F5344CB8AC3E}">
+        <p14:creationId xmlns:p14="http://schemas.microsoft.com/office/powerpoint/2010/main" val="629863178"/>
+      </p:ext>
+    </p:extLst>
+  </p:cSld>
+  <p:clrMapOvr>
+    <a:masterClrMapping/>
+  </p:clrMapOvr>
+</p:sld>
+</file>
+
+<file path=ppt/slides/slide11.xml><?xml version="1.0" encoding="utf-8"?>
+<p:sld xmlns:a="http://schemas.openxmlformats.org/drawingml/2006/main" xmlns:r="http://schemas.openxmlformats.org/officeDocument/2006/relationships" xmlns:p="http://schemas.openxmlformats.org/presentationml/2006/main">
+  <p:cSld>
+    <p:spTree>
+      <p:nvGrpSpPr>
+        <p:cNvPr id="1" name=""/>
+        <p:cNvGrpSpPr/>
+        <p:nvPr/>
+      </p:nvGrpSpPr>
+      <p:grpSpPr>
+        <a:xfrm>
+          <a:off x="0" y="0"/>
+          <a:ext cx="0" cy="0"/>
+          <a:chOff x="0" y="0"/>
+          <a:chExt cx="0" cy="0"/>
+        </a:xfrm>
+      </p:grpSpPr>
+      <p:sp>
+        <p:nvSpPr>
+          <p:cNvPr id="4" name="Titre 3">
+            <a:extLst>
+              <a:ext uri="{FF2B5EF4-FFF2-40B4-BE49-F238E27FC236}">
+                <a16:creationId xmlns:a16="http://schemas.microsoft.com/office/drawing/2014/main" id="{2A75DFE1-7DA0-49A6-F9D3-DD5FEA99BB44}"/>
+              </a:ext>
+            </a:extLst>
+          </p:cNvPr>
+          <p:cNvSpPr>
+            <a:spLocks noGrp="1"/>
+          </p:cNvSpPr>
+          <p:nvPr>
+            <p:ph type="title"/>
+          </p:nvPr>
+        </p:nvSpPr>
+        <p:spPr/>
+        <p:txBody>
+          <a:bodyPr/>
+          <a:lstStyle/>
+          <a:p>
+            <a:r>
+              <a:rPr lang="fr-FR" dirty="0"/>
+              <a:t>Implémentation dans ggplot2</a:t>
+            </a:r>
+          </a:p>
+        </p:txBody>
+      </p:sp>
+      <p:pic>
+        <p:nvPicPr>
+          <p:cNvPr id="8" name="Espace réservé du contenu 7">
+            <a:extLst>
+              <a:ext uri="{FF2B5EF4-FFF2-40B4-BE49-F238E27FC236}">
+                <a16:creationId xmlns:a16="http://schemas.microsoft.com/office/drawing/2014/main" id="{B908DDC8-9A5E-B2B4-E980-59BE5D065659}"/>
+              </a:ext>
+            </a:extLst>
+          </p:cNvPr>
+          <p:cNvPicPr>
+            <a:picLocks noGrp="1" noChangeAspect="1"/>
+          </p:cNvPicPr>
+          <p:nvPr>
+            <p:ph sz="half" idx="2"/>
+          </p:nvPr>
+        </p:nvPicPr>
+        <p:blipFill>
+          <a:blip r:embed="rId2"/>
+          <a:stretch>
+            <a:fillRect/>
+          </a:stretch>
+        </p:blipFill>
+        <p:spPr>
+          <a:xfrm>
+            <a:off x="7265302" y="1825625"/>
+            <a:ext cx="2995396" cy="4351338"/>
+          </a:xfrm>
+        </p:spPr>
+      </p:pic>
+      <p:graphicFrame>
+        <p:nvGraphicFramePr>
+          <p:cNvPr id="9" name="Content Placeholder 5">
+            <a:extLst>
+              <a:ext uri="{FF2B5EF4-FFF2-40B4-BE49-F238E27FC236}">
+                <a16:creationId xmlns:a16="http://schemas.microsoft.com/office/drawing/2014/main" id="{1D0078D1-21F1-9497-FC86-0B18BA576954}"/>
+              </a:ext>
+            </a:extLst>
+          </p:cNvPr>
+          <p:cNvGraphicFramePr>
+            <a:graphicFrameLocks noGrp="1"/>
+          </p:cNvGraphicFramePr>
+          <p:nvPr>
+            <p:ph sz="half" idx="1"/>
+            <p:extLst>
+              <p:ext uri="{D42A27DB-BD31-4B8C-83A1-F6EECF244321}">
+                <p14:modId xmlns:p14="http://schemas.microsoft.com/office/powerpoint/2010/main" val="1323159758"/>
+              </p:ext>
+            </p:extLst>
+          </p:nvPr>
+        </p:nvGraphicFramePr>
+        <p:xfrm>
+          <a:off x="625134" y="2205383"/>
+          <a:ext cx="6427906" cy="3591822"/>
+        </p:xfrm>
+        <a:graphic>
+          <a:graphicData uri="http://schemas.openxmlformats.org/drawingml/2006/table">
+            <a:tbl>
+              <a:tblPr bandRow="1">
+                <a:tableStyleId>{21E4AEA4-8DFA-4A89-87EB-49C32662AFE0}</a:tableStyleId>
+              </a:tblPr>
+              <a:tblGrid>
+                <a:gridCol w="1315403">
+                  <a:extLst>
+                    <a:ext uri="{9D8B030D-6E8A-4147-A177-3AD203B41FA5}">
+                      <a16:colId xmlns:a16="http://schemas.microsoft.com/office/drawing/2014/main" val="20000"/>
+                    </a:ext>
+                  </a:extLst>
+                </a:gridCol>
+                <a:gridCol w="861632">
+                  <a:extLst>
+                    <a:ext uri="{9D8B030D-6E8A-4147-A177-3AD203B41FA5}">
+                      <a16:colId xmlns:a16="http://schemas.microsoft.com/office/drawing/2014/main" val="20001"/>
+                    </a:ext>
+                  </a:extLst>
+                </a:gridCol>
+                <a:gridCol w="4250871">
+                  <a:extLst>
+                    <a:ext uri="{9D8B030D-6E8A-4147-A177-3AD203B41FA5}">
+                      <a16:colId xmlns:a16="http://schemas.microsoft.com/office/drawing/2014/main" val="20002"/>
+                    </a:ext>
+                  </a:extLst>
+                </a:gridCol>
+              </a:tblGrid>
+              <a:tr h="636049">
+                <a:tc>
+                  <a:txBody>
+                    <a:bodyPr/>
+                    <a:lstStyle/>
+                    <a:p>
+                      <a:pPr marL="0" lvl="0" indent="0" algn="ctr">
+                        <a:buNone/>
+                      </a:pPr>
+                      <a:r>
+                        <a:rPr lang="fr-FR" sz="1600" dirty="0"/>
+                        <a:t>Data</a:t>
+                      </a:r>
+                      <a:endParaRPr sz="1600" dirty="0"/>
+                    </a:p>
+                  </a:txBody>
+                  <a:tcPr marL="121920" marR="121920" marT="60960" marB="60960"/>
+                </a:tc>
+                <a:tc>
+                  <a:txBody>
+                    <a:bodyPr/>
+                    <a:lstStyle/>
+                    <a:p>
+                      <a:pPr marL="0" lvl="0" indent="0" algn="l">
+                        <a:buNone/>
+                      </a:pPr>
+                      <a:r>
+                        <a:rPr sz="1400" dirty="0"/>
+                        <a:t>data</a:t>
+                      </a:r>
+                      <a:endParaRPr sz="1400" dirty="0">
+                        <a:latin typeface="Courier"/>
+                      </a:endParaRPr>
+                    </a:p>
+                  </a:txBody>
+                  <a:tcPr marL="121920" marR="121920" marT="60960" marB="60960"/>
+                </a:tc>
+                <a:tc>
+                  <a:txBody>
+                    <a:bodyPr/>
+                    <a:lstStyle/>
+                    <a:p>
+                      <a:pPr marL="0" lvl="0" indent="0" algn="r">
+                        <a:buNone/>
+                      </a:pPr>
+                      <a:r>
+                        <a:rPr lang="fr-FR" sz="1400" dirty="0" err="1"/>
+                        <a:t>Dataset</a:t>
+                      </a:r>
+                      <a:r>
+                        <a:rPr lang="fr-FR" sz="1400" dirty="0"/>
+                        <a:t> (data-frame or </a:t>
+                      </a:r>
+                      <a:r>
+                        <a:rPr lang="fr-FR" sz="1400" dirty="0" err="1"/>
+                        <a:t>tibble</a:t>
+                      </a:r>
+                      <a:r>
+                        <a:rPr lang="fr-FR" sz="1400" dirty="0"/>
+                        <a:t>) </a:t>
+                      </a:r>
+                      <a:r>
+                        <a:rPr lang="fr-FR" sz="1400" dirty="0" err="1"/>
+                        <a:t>containing</a:t>
+                      </a:r>
+                      <a:r>
+                        <a:rPr lang="fr-FR" sz="1400" dirty="0"/>
+                        <a:t> the data </a:t>
+                      </a:r>
+                      <a:r>
+                        <a:rPr lang="fr-FR" sz="1400" dirty="0" err="1"/>
+                        <a:t>that</a:t>
+                      </a:r>
+                      <a:r>
+                        <a:rPr lang="fr-FR" sz="1400" dirty="0"/>
+                        <a:t> </a:t>
+                      </a:r>
+                      <a:r>
+                        <a:rPr lang="fr-FR" sz="1400" dirty="0" err="1"/>
+                        <a:t>needs</a:t>
+                      </a:r>
+                      <a:r>
+                        <a:rPr lang="fr-FR" sz="1400" dirty="0"/>
+                        <a:t> to </a:t>
+                      </a:r>
+                      <a:r>
+                        <a:rPr lang="fr-FR" sz="1400" dirty="0" err="1"/>
+                        <a:t>be</a:t>
+                      </a:r>
+                      <a:r>
+                        <a:rPr lang="fr-FR" sz="1400" dirty="0"/>
+                        <a:t> </a:t>
+                      </a:r>
+                      <a:r>
+                        <a:rPr lang="fr-FR" sz="1400" dirty="0" err="1"/>
+                        <a:t>drawn</a:t>
+                      </a:r>
+                      <a:r>
+                        <a:rPr lang="fr-FR" sz="1400" dirty="0"/>
+                        <a:t> </a:t>
+                      </a:r>
+                      <a:endParaRPr sz="1400" dirty="0"/>
+                    </a:p>
+                  </a:txBody>
+                  <a:tcPr marL="121920" marR="121920" marT="60960" marB="60960"/>
+                </a:tc>
+                <a:extLst>
+                  <a:ext uri="{0D108BD9-81ED-4DB2-BD59-A6C34878D82A}">
+                    <a16:rowId xmlns:a16="http://schemas.microsoft.com/office/drawing/2014/main" val="10000"/>
+                  </a:ext>
+                </a:extLst>
+              </a:tr>
+              <a:tr h="658693">
+                <a:tc>
+                  <a:txBody>
+                    <a:bodyPr/>
+                    <a:lstStyle/>
+                    <a:p>
+                      <a:pPr marL="0" lvl="0" indent="0" algn="ctr">
+                        <a:buNone/>
+                      </a:pPr>
+                      <a:r>
+                        <a:rPr lang="fr-FR" sz="1600" dirty="0" err="1"/>
+                        <a:t>Geometries</a:t>
+                      </a:r>
+                      <a:endParaRPr sz="1600" dirty="0"/>
+                    </a:p>
+                  </a:txBody>
+                  <a:tcPr marL="121920" marR="121920" marT="60960" marB="60960"/>
+                </a:tc>
+                <a:tc>
+                  <a:txBody>
+                    <a:bodyPr/>
+                    <a:lstStyle/>
+                    <a:p>
+                      <a:pPr marL="0" lvl="0" indent="0" algn="l">
+                        <a:buNone/>
+                      </a:pPr>
+                      <a:r>
+                        <a:rPr sz="1400" dirty="0" err="1"/>
+                        <a:t>geom</a:t>
+                      </a:r>
+                      <a:r>
+                        <a:rPr sz="1400" dirty="0"/>
+                        <a:t>_</a:t>
+                      </a:r>
+                      <a:endParaRPr sz="1400" dirty="0">
+                        <a:latin typeface="Courier"/>
+                      </a:endParaRPr>
+                    </a:p>
+                  </a:txBody>
+                  <a:tcPr marL="121920" marR="121920" marT="60960" marB="60960"/>
+                </a:tc>
+                <a:tc>
+                  <a:txBody>
+                    <a:bodyPr/>
+                    <a:lstStyle/>
+                    <a:p>
+                      <a:pPr marL="0" lvl="0" indent="0" algn="r">
+                        <a:buNone/>
+                      </a:pPr>
+                      <a:r>
+                        <a:rPr lang="fr-FR" sz="1400" dirty="0" err="1"/>
+                        <a:t>Graphical</a:t>
+                      </a:r>
+                      <a:r>
+                        <a:rPr lang="fr-FR" sz="1400" dirty="0"/>
+                        <a:t> </a:t>
+                      </a:r>
+                      <a:r>
+                        <a:rPr lang="fr-FR" sz="1400" dirty="0" err="1"/>
+                        <a:t>objects</a:t>
+                      </a:r>
+                      <a:r>
+                        <a:rPr lang="fr-FR" sz="1400" dirty="0"/>
+                        <a:t> </a:t>
+                      </a:r>
+                      <a:r>
+                        <a:rPr lang="fr-FR" sz="1400" dirty="0" err="1"/>
+                        <a:t>used</a:t>
+                      </a:r>
+                      <a:r>
+                        <a:rPr lang="fr-FR" sz="1400" dirty="0"/>
+                        <a:t> to </a:t>
+                      </a:r>
+                      <a:r>
+                        <a:rPr lang="fr-FR" sz="1400" dirty="0" err="1"/>
+                        <a:t>represent</a:t>
+                      </a:r>
+                      <a:r>
+                        <a:rPr lang="fr-FR" sz="1400" dirty="0"/>
+                        <a:t> the </a:t>
+                      </a:r>
+                      <a:r>
+                        <a:rPr lang="fr-FR" sz="1400" dirty="0" err="1"/>
+                        <a:t>chosen</a:t>
+                      </a:r>
+                      <a:r>
+                        <a:rPr lang="fr-FR" sz="1400" dirty="0"/>
+                        <a:t> data </a:t>
+                      </a:r>
+                      <a:r>
+                        <a:rPr lang="fr-FR" sz="1400" dirty="0" err="1"/>
+                        <a:t>into</a:t>
+                      </a:r>
+                      <a:r>
+                        <a:rPr lang="fr-FR" sz="1400" dirty="0"/>
+                        <a:t> </a:t>
+                      </a:r>
+                      <a:r>
+                        <a:rPr lang="fr-FR" sz="1400" dirty="0" err="1"/>
+                        <a:t>shapes</a:t>
+                      </a:r>
+                      <a:r>
+                        <a:rPr lang="fr-FR" sz="1400" dirty="0"/>
+                        <a:t>, </a:t>
+                      </a:r>
+                      <a:r>
+                        <a:rPr lang="fr-FR" sz="1400" dirty="0" err="1"/>
+                        <a:t>colors</a:t>
+                      </a:r>
+                      <a:r>
+                        <a:rPr lang="fr-FR" sz="1400" dirty="0"/>
+                        <a:t>, dots etc…</a:t>
+                      </a:r>
+                      <a:endParaRPr sz="1400" dirty="0"/>
+                    </a:p>
+                  </a:txBody>
+                  <a:tcPr marL="121920" marR="121920" marT="60960" marB="60960"/>
+                </a:tc>
+                <a:extLst>
+                  <a:ext uri="{0D108BD9-81ED-4DB2-BD59-A6C34878D82A}">
+                    <a16:rowId xmlns:a16="http://schemas.microsoft.com/office/drawing/2014/main" val="10001"/>
+                  </a:ext>
+                </a:extLst>
+              </a:tr>
+              <a:tr h="836852">
+                <a:tc>
+                  <a:txBody>
+                    <a:bodyPr/>
+                    <a:lstStyle/>
+                    <a:p>
+                      <a:pPr marL="0" lvl="0" indent="0" algn="ctr">
+                        <a:buNone/>
+                      </a:pPr>
+                      <a:r>
+                        <a:rPr lang="fr-FR" sz="1600" dirty="0" err="1"/>
+                        <a:t>Aesthetics</a:t>
+                      </a:r>
+                      <a:endParaRPr sz="1600" dirty="0"/>
+                    </a:p>
+                  </a:txBody>
+                  <a:tcPr marL="121920" marR="121920" marT="60960" marB="60960"/>
+                </a:tc>
+                <a:tc>
+                  <a:txBody>
+                    <a:bodyPr/>
+                    <a:lstStyle/>
+                    <a:p>
+                      <a:pPr marL="0" lvl="0" indent="0" algn="l">
+                        <a:buNone/>
+                      </a:pPr>
+                      <a:r>
+                        <a:rPr sz="1400" dirty="0" err="1"/>
+                        <a:t>aes</a:t>
+                      </a:r>
+                      <a:r>
+                        <a:rPr sz="1400" dirty="0"/>
+                        <a:t>()</a:t>
+                      </a:r>
+                      <a:endParaRPr sz="1400" dirty="0">
+                        <a:latin typeface="Courier"/>
+                      </a:endParaRPr>
+                    </a:p>
+                  </a:txBody>
+                  <a:tcPr marL="121920" marR="121920" marT="60960" marB="60960"/>
+                </a:tc>
+                <a:tc>
+                  <a:txBody>
+                    <a:bodyPr/>
+                    <a:lstStyle/>
+                    <a:p>
+                      <a:pPr marL="0" lvl="0" indent="0" algn="r">
+                        <a:buNone/>
+                      </a:pPr>
+                      <a:r>
+                        <a:rPr lang="fr-FR" sz="1400" dirty="0" err="1"/>
+                        <a:t>Aesthetics</a:t>
+                      </a:r>
+                      <a:r>
+                        <a:rPr lang="fr-FR" sz="1400" dirty="0"/>
+                        <a:t> </a:t>
+                      </a:r>
+                      <a:r>
+                        <a:rPr lang="fr-FR" sz="1400" dirty="0" err="1"/>
+                        <a:t>parameters</a:t>
+                      </a:r>
+                      <a:r>
+                        <a:rPr lang="fr-FR" sz="1400" dirty="0"/>
+                        <a:t>, </a:t>
+                      </a:r>
+                      <a:r>
+                        <a:rPr lang="fr-FR" sz="1400" dirty="0" err="1"/>
+                        <a:t>meaning</a:t>
+                      </a:r>
+                      <a:r>
+                        <a:rPr lang="fr-FR" sz="1400" dirty="0"/>
+                        <a:t> the type of </a:t>
+                      </a:r>
+                      <a:r>
+                        <a:rPr lang="fr-FR" sz="1400" dirty="0" err="1"/>
+                        <a:t>graphical</a:t>
+                      </a:r>
+                      <a:r>
+                        <a:rPr lang="fr-FR" sz="1400" dirty="0"/>
+                        <a:t> </a:t>
+                      </a:r>
+                      <a:r>
+                        <a:rPr lang="fr-FR" sz="1400" dirty="0" err="1"/>
+                        <a:t>property</a:t>
+                      </a:r>
+                      <a:r>
+                        <a:rPr lang="fr-FR" sz="1400" dirty="0"/>
+                        <a:t> </a:t>
+                      </a:r>
+                      <a:r>
+                        <a:rPr lang="fr-FR" sz="1400" dirty="0" err="1"/>
+                        <a:t>that</a:t>
+                      </a:r>
+                      <a:r>
+                        <a:rPr lang="fr-FR" sz="1400" dirty="0"/>
+                        <a:t> </a:t>
+                      </a:r>
+                      <a:r>
+                        <a:rPr lang="fr-FR" sz="1400" dirty="0" err="1"/>
+                        <a:t>needs</a:t>
+                      </a:r>
+                      <a:r>
+                        <a:rPr lang="fr-FR" sz="1400" dirty="0"/>
+                        <a:t> to </a:t>
+                      </a:r>
+                      <a:r>
+                        <a:rPr lang="fr-FR" sz="1400" dirty="0" err="1"/>
+                        <a:t>be</a:t>
+                      </a:r>
+                      <a:r>
+                        <a:rPr lang="fr-FR" sz="1400" dirty="0"/>
+                        <a:t> </a:t>
+                      </a:r>
+                      <a:r>
+                        <a:rPr lang="fr-FR" sz="1400" dirty="0" err="1"/>
+                        <a:t>associated</a:t>
+                      </a:r>
+                      <a:r>
+                        <a:rPr lang="fr-FR" sz="1400" dirty="0"/>
+                        <a:t> </a:t>
+                      </a:r>
+                      <a:r>
+                        <a:rPr lang="fr-FR" sz="1400" dirty="0" err="1"/>
+                        <a:t>with</a:t>
+                      </a:r>
+                      <a:r>
+                        <a:rPr lang="fr-FR" sz="1400" dirty="0"/>
+                        <a:t> a </a:t>
+                      </a:r>
+                      <a:r>
+                        <a:rPr lang="fr-FR" sz="1400" dirty="0" err="1"/>
+                        <a:t>column</a:t>
+                      </a:r>
+                      <a:r>
+                        <a:rPr lang="fr-FR" sz="1400" dirty="0"/>
+                        <a:t> of the </a:t>
+                      </a:r>
+                      <a:r>
+                        <a:rPr lang="fr-FR" sz="1400" dirty="0" err="1"/>
+                        <a:t>dataset</a:t>
+                      </a:r>
+                      <a:r>
+                        <a:rPr lang="fr-FR" sz="1400" dirty="0"/>
+                        <a:t>.</a:t>
+                      </a:r>
+                      <a:endParaRPr sz="1400" dirty="0"/>
+                    </a:p>
+                  </a:txBody>
+                  <a:tcPr marL="121920" marR="121920" marT="60960" marB="60960"/>
+                </a:tc>
+                <a:extLst>
+                  <a:ext uri="{0D108BD9-81ED-4DB2-BD59-A6C34878D82A}">
+                    <a16:rowId xmlns:a16="http://schemas.microsoft.com/office/drawing/2014/main" val="10002"/>
+                  </a:ext>
+                </a:extLst>
+              </a:tr>
+              <a:tr h="1460228">
+                <a:tc>
+                  <a:txBody>
+                    <a:bodyPr/>
+                    <a:lstStyle/>
+                    <a:p>
+                      <a:pPr marL="0" lvl="0" indent="0" algn="ctr">
+                        <a:buNone/>
+                      </a:pPr>
+                      <a:r>
+                        <a:rPr lang="fr-FR" sz="1600" dirty="0" err="1"/>
+                        <a:t>Scales</a:t>
+                      </a:r>
+                      <a:endParaRPr sz="1600" dirty="0"/>
+                    </a:p>
+                  </a:txBody>
+                  <a:tcPr marL="121920" marR="121920" marT="60960" marB="60960"/>
+                </a:tc>
+                <a:tc>
+                  <a:txBody>
+                    <a:bodyPr/>
+                    <a:lstStyle/>
+                    <a:p>
+                      <a:pPr marL="0" lvl="0" indent="0" algn="l">
+                        <a:buNone/>
+                      </a:pPr>
+                      <a:r>
+                        <a:rPr sz="1400" dirty="0"/>
+                        <a:t>scale_</a:t>
+                      </a:r>
+                      <a:endParaRPr sz="1400" dirty="0">
+                        <a:latin typeface="Courier"/>
+                      </a:endParaRPr>
+                    </a:p>
+                  </a:txBody>
+                  <a:tcPr marL="121920" marR="121920" marT="60960" marB="60960"/>
+                </a:tc>
+                <a:tc>
+                  <a:txBody>
+                    <a:bodyPr/>
+                    <a:lstStyle/>
+                    <a:p>
+                      <a:pPr marL="0" lvl="0" indent="0" algn="r">
+                        <a:buNone/>
+                      </a:pPr>
+                      <a:r>
+                        <a:rPr lang="fr-FR" sz="1400" dirty="0" err="1"/>
+                        <a:t>Functions</a:t>
+                      </a:r>
+                      <a:r>
+                        <a:rPr lang="fr-FR" sz="1400" dirty="0"/>
+                        <a:t> </a:t>
+                      </a:r>
+                      <a:r>
+                        <a:rPr lang="fr-FR" sz="1400" dirty="0" err="1"/>
+                        <a:t>used</a:t>
+                      </a:r>
+                      <a:r>
+                        <a:rPr lang="fr-FR" sz="1400" dirty="0"/>
+                        <a:t> to </a:t>
+                      </a:r>
+                      <a:r>
+                        <a:rPr lang="fr-FR" sz="1400" dirty="0" err="1"/>
+                        <a:t>customize</a:t>
+                      </a:r>
+                      <a:r>
+                        <a:rPr lang="fr-FR" sz="1400" dirty="0"/>
+                        <a:t> the transformation of values (</a:t>
+                      </a:r>
+                      <a:r>
+                        <a:rPr lang="fr-FR" sz="1400" dirty="0" err="1"/>
+                        <a:t>from</a:t>
+                      </a:r>
+                      <a:r>
+                        <a:rPr lang="fr-FR" sz="1400" dirty="0"/>
+                        <a:t> the </a:t>
+                      </a:r>
+                      <a:r>
+                        <a:rPr lang="fr-FR" sz="1400" dirty="0" err="1"/>
+                        <a:t>dataset</a:t>
+                      </a:r>
+                      <a:r>
+                        <a:rPr lang="fr-FR" sz="1400" dirty="0"/>
+                        <a:t>) </a:t>
+                      </a:r>
+                      <a:r>
+                        <a:rPr lang="fr-FR" sz="1400" dirty="0" err="1"/>
+                        <a:t>into</a:t>
+                      </a:r>
+                      <a:r>
+                        <a:rPr lang="fr-FR" sz="1400" dirty="0"/>
+                        <a:t> </a:t>
+                      </a:r>
+                      <a:r>
+                        <a:rPr lang="fr-FR" sz="1400" dirty="0" err="1"/>
+                        <a:t>graphical</a:t>
+                      </a:r>
+                      <a:r>
+                        <a:rPr lang="fr-FR" sz="1400" dirty="0"/>
+                        <a:t> </a:t>
+                      </a:r>
+                      <a:r>
+                        <a:rPr lang="fr-FR" sz="1400" dirty="0" err="1"/>
+                        <a:t>objects</a:t>
+                      </a:r>
+                      <a:r>
+                        <a:rPr lang="fr-FR" sz="1400" dirty="0"/>
+                        <a:t>. A </a:t>
+                      </a:r>
+                      <a:r>
+                        <a:rPr lang="fr-FR" sz="1400" dirty="0" err="1"/>
+                        <a:t>scale</a:t>
+                      </a:r>
+                      <a:r>
+                        <a:rPr lang="fr-FR" sz="1400" dirty="0"/>
+                        <a:t> </a:t>
+                      </a:r>
+                      <a:r>
+                        <a:rPr lang="fr-FR" sz="1400" dirty="0" err="1"/>
+                        <a:t>function</a:t>
+                      </a:r>
+                      <a:r>
+                        <a:rPr lang="fr-FR" sz="1400" dirty="0"/>
+                        <a:t> </a:t>
+                      </a:r>
+                      <a:r>
+                        <a:rPr lang="fr-FR" sz="1400" dirty="0" err="1"/>
+                        <a:t>needs</a:t>
+                      </a:r>
+                      <a:r>
+                        <a:rPr lang="fr-FR" sz="1400" dirty="0"/>
+                        <a:t> to </a:t>
+                      </a:r>
+                      <a:r>
+                        <a:rPr lang="fr-FR" sz="1400" dirty="0" err="1"/>
+                        <a:t>be</a:t>
+                      </a:r>
+                      <a:r>
+                        <a:rPr lang="fr-FR" sz="1400" dirty="0"/>
+                        <a:t> </a:t>
+                      </a:r>
+                      <a:r>
+                        <a:rPr lang="fr-FR" sz="1400" dirty="0" err="1"/>
+                        <a:t>associated</a:t>
+                      </a:r>
+                      <a:r>
+                        <a:rPr lang="fr-FR" sz="1400" dirty="0"/>
+                        <a:t> to an </a:t>
+                      </a:r>
+                      <a:r>
+                        <a:rPr lang="fr-FR" sz="1400" dirty="0" err="1"/>
+                        <a:t>aesthetic</a:t>
+                      </a:r>
+                      <a:r>
+                        <a:rPr lang="fr-FR" sz="1400" dirty="0"/>
+                        <a:t> </a:t>
+                      </a:r>
+                      <a:r>
+                        <a:rPr lang="fr-FR" sz="1400" dirty="0" err="1"/>
+                        <a:t>parameter</a:t>
+                      </a:r>
+                      <a:r>
+                        <a:rPr lang="fr-FR" sz="1400" dirty="0"/>
+                        <a:t>. </a:t>
+                      </a:r>
+                      <a:endParaRPr sz="1400" dirty="0"/>
+                    </a:p>
+                  </a:txBody>
+                  <a:tcPr marL="121920" marR="121920" marT="60960" marB="60960"/>
+                </a:tc>
+                <a:extLst>
+                  <a:ext uri="{0D108BD9-81ED-4DB2-BD59-A6C34878D82A}">
+                    <a16:rowId xmlns:a16="http://schemas.microsoft.com/office/drawing/2014/main" val="10003"/>
+                  </a:ext>
+                </a:extLst>
+              </a:tr>
+            </a:tbl>
+          </a:graphicData>
+        </a:graphic>
+      </p:graphicFrame>
+    </p:spTree>
+    <p:extLst>
+      <p:ext uri="{BB962C8B-B14F-4D97-AF65-F5344CB8AC3E}">
+        <p14:creationId xmlns:p14="http://schemas.microsoft.com/office/powerpoint/2010/main" val="402584763"/>
+      </p:ext>
+    </p:extLst>
+  </p:cSld>
+  <p:clrMapOvr>
+    <a:masterClrMapping/>
+  </p:clrMapOvr>
+</p:sld>
+</file>
+
+<file path=ppt/slides/slide12.xml><?xml version="1.0" encoding="utf-8"?>
+<p:sld xmlns:a="http://schemas.openxmlformats.org/drawingml/2006/main" xmlns:r="http://schemas.openxmlformats.org/officeDocument/2006/relationships" xmlns:p="http://schemas.openxmlformats.org/presentationml/2006/main">
+  <p:cSld>
+    <p:spTree>
+      <p:nvGrpSpPr>
+        <p:cNvPr id="1" name=""/>
+        <p:cNvGrpSpPr/>
+        <p:nvPr/>
+      </p:nvGrpSpPr>
+      <p:grpSpPr>
+        <a:xfrm>
+          <a:off x="0" y="0"/>
+          <a:ext cx="0" cy="0"/>
+          <a:chOff x="0" y="0"/>
+          <a:chExt cx="0" cy="0"/>
+        </a:xfrm>
+      </p:grpSpPr>
+      <p:sp>
+        <p:nvSpPr>
+          <p:cNvPr id="2" name="Titre 1">
+            <a:extLst>
+              <a:ext uri="{FF2B5EF4-FFF2-40B4-BE49-F238E27FC236}">
+                <a16:creationId xmlns:a16="http://schemas.microsoft.com/office/drawing/2014/main" id="{DE201F5D-3800-22B2-F2A3-C6F12A102169}"/>
+              </a:ext>
+            </a:extLst>
+          </p:cNvPr>
+          <p:cNvSpPr>
+            <a:spLocks noGrp="1"/>
+          </p:cNvSpPr>
+          <p:nvPr>
+            <p:ph type="title"/>
+          </p:nvPr>
+        </p:nvSpPr>
+        <p:spPr/>
+        <p:txBody>
+          <a:bodyPr/>
+          <a:lstStyle/>
+          <a:p>
+            <a:r>
+              <a:rPr lang="fr-FR" dirty="0" err="1"/>
+              <a:t>Exercise</a:t>
+            </a:r>
+            <a:endParaRPr lang="fr-FR" dirty="0"/>
+          </a:p>
+        </p:txBody>
+      </p:sp>
+      <p:sp>
+        <p:nvSpPr>
+          <p:cNvPr id="3" name="Espace réservé du contenu 2">
+            <a:extLst>
+              <a:ext uri="{FF2B5EF4-FFF2-40B4-BE49-F238E27FC236}">
+                <a16:creationId xmlns:a16="http://schemas.microsoft.com/office/drawing/2014/main" id="{3E1F02D2-E268-6693-4F72-4E9E490C826A}"/>
+              </a:ext>
+            </a:extLst>
+          </p:cNvPr>
+          <p:cNvSpPr>
+            <a:spLocks noGrp="1"/>
+          </p:cNvSpPr>
+          <p:nvPr>
+            <p:ph idx="1"/>
+          </p:nvPr>
+        </p:nvSpPr>
+        <p:spPr/>
+        <p:txBody>
+          <a:bodyPr/>
+          <a:lstStyle/>
+          <a:p>
+            <a:pPr marL="0" indent="0">
+              <a:buNone/>
+            </a:pPr>
+            <a:r>
+              <a:rPr lang="fr-FR" dirty="0" err="1"/>
+              <a:t>Create</a:t>
+            </a:r>
+            <a:r>
+              <a:rPr lang="fr-FR" dirty="0"/>
+              <a:t> a </a:t>
+            </a:r>
+            <a:r>
+              <a:rPr lang="fr-FR" b="1" u="sng" dirty="0" err="1"/>
+              <a:t>histogram</a:t>
+            </a:r>
+            <a:r>
+              <a:rPr lang="fr-FR" dirty="0"/>
+              <a:t> of the expression of IFNG for </a:t>
+            </a:r>
+          </a:p>
+          <a:p>
+            <a:r>
+              <a:rPr lang="fr-FR" dirty="0"/>
+              <a:t>all </a:t>
+            </a:r>
+            <a:r>
+              <a:rPr lang="fr-FR" dirty="0" err="1"/>
+              <a:t>subjects</a:t>
+            </a:r>
+            <a:endParaRPr lang="fr-FR" dirty="0"/>
+          </a:p>
+          <a:p>
+            <a:r>
+              <a:rPr lang="fr-FR" dirty="0" err="1"/>
+              <a:t>healthy</a:t>
+            </a:r>
+            <a:r>
+              <a:rPr lang="fr-FR" dirty="0"/>
+              <a:t> </a:t>
+            </a:r>
+            <a:r>
+              <a:rPr lang="fr-FR" dirty="0" err="1"/>
+              <a:t>controls</a:t>
+            </a:r>
+            <a:r>
+              <a:rPr lang="fr-FR" dirty="0"/>
+              <a:t> </a:t>
+            </a:r>
+            <a:r>
+              <a:rPr lang="fr-FR" dirty="0" err="1"/>
+              <a:t>only</a:t>
+            </a:r>
+            <a:endParaRPr lang="fr-FR" dirty="0"/>
+          </a:p>
+          <a:p>
+            <a:pPr marL="0" indent="0">
+              <a:buNone/>
+            </a:pPr>
+            <a:endParaRPr lang="fr-FR" dirty="0"/>
+          </a:p>
+        </p:txBody>
+      </p:sp>
+    </p:spTree>
+    <p:extLst>
+      <p:ext uri="{BB962C8B-B14F-4D97-AF65-F5344CB8AC3E}">
+        <p14:creationId xmlns:p14="http://schemas.microsoft.com/office/powerpoint/2010/main" val="799862487"/>
+      </p:ext>
+    </p:extLst>
+  </p:cSld>
+  <p:clrMapOvr>
+    <a:masterClrMapping/>
+  </p:clrMapOvr>
+</p:sld>
+</file>
+
+<file path=ppt/slides/slide13.xml><?xml version="1.0" encoding="utf-8"?>
+<p:sld xmlns:a="http://schemas.openxmlformats.org/drawingml/2006/main" xmlns:r="http://schemas.openxmlformats.org/officeDocument/2006/relationships" xmlns:p="http://schemas.openxmlformats.org/presentationml/2006/main">
+  <p:cSld>
+    <p:spTree>
+      <p:nvGrpSpPr>
+        <p:cNvPr id="1" name=""/>
+        <p:cNvGrpSpPr/>
+        <p:nvPr/>
+      </p:nvGrpSpPr>
+      <p:grpSpPr>
+        <a:xfrm>
+          <a:off x="0" y="0"/>
+          <a:ext cx="0" cy="0"/>
+          <a:chOff x="0" y="0"/>
+          <a:chExt cx="0" cy="0"/>
+        </a:xfrm>
+      </p:grpSpPr>
+      <p:sp>
+        <p:nvSpPr>
+          <p:cNvPr id="2" name="Titre 1">
+            <a:extLst>
+              <a:ext uri="{FF2B5EF4-FFF2-40B4-BE49-F238E27FC236}">
+                <a16:creationId xmlns:a16="http://schemas.microsoft.com/office/drawing/2014/main" id="{60DB961A-C2BA-B884-1622-A9EBA2F8F8E4}"/>
+              </a:ext>
+            </a:extLst>
+          </p:cNvPr>
+          <p:cNvSpPr>
+            <a:spLocks noGrp="1"/>
+          </p:cNvSpPr>
+          <p:nvPr>
+            <p:ph type="title"/>
+          </p:nvPr>
+        </p:nvSpPr>
+        <p:spPr/>
+        <p:txBody>
+          <a:bodyPr/>
+          <a:lstStyle/>
+          <a:p>
+            <a:r>
+              <a:rPr lang="fr-FR" dirty="0"/>
+              <a:t>Conclusion: </a:t>
+            </a:r>
+            <a:r>
+              <a:rPr lang="fr-FR" dirty="0" err="1"/>
+              <a:t>everything</a:t>
+            </a:r>
+            <a:r>
+              <a:rPr lang="fr-FR" dirty="0"/>
+              <a:t> </a:t>
+            </a:r>
+            <a:r>
+              <a:rPr lang="fr-FR" dirty="0" err="1"/>
+              <a:t>is</a:t>
+            </a:r>
+            <a:r>
+              <a:rPr lang="fr-FR" dirty="0"/>
+              <a:t> </a:t>
+            </a:r>
+            <a:r>
+              <a:rPr lang="fr-FR" dirty="0" err="1"/>
+              <a:t>customizable</a:t>
+            </a:r>
+            <a:endParaRPr lang="fr-FR" dirty="0"/>
+          </a:p>
+        </p:txBody>
+      </p:sp>
+      <p:sp>
+        <p:nvSpPr>
+          <p:cNvPr id="3" name="Espace réservé du contenu 2">
+            <a:extLst>
+              <a:ext uri="{FF2B5EF4-FFF2-40B4-BE49-F238E27FC236}">
+                <a16:creationId xmlns:a16="http://schemas.microsoft.com/office/drawing/2014/main" id="{EE9D0869-8749-E653-F93E-6775D5196997}"/>
+              </a:ext>
+            </a:extLst>
+          </p:cNvPr>
+          <p:cNvSpPr>
+            <a:spLocks noGrp="1"/>
+          </p:cNvSpPr>
+          <p:nvPr>
+            <p:ph idx="1"/>
+          </p:nvPr>
+        </p:nvSpPr>
+        <p:spPr/>
+        <p:txBody>
+          <a:bodyPr/>
+          <a:lstStyle/>
+          <a:p>
+            <a:r>
+              <a:rPr lang="fr-FR" dirty="0" err="1"/>
+              <a:t>Aesthetics</a:t>
+            </a:r>
+            <a:r>
+              <a:rPr lang="fr-FR" dirty="0"/>
+              <a:t>: </a:t>
+            </a:r>
+            <a:r>
+              <a:rPr lang="fr-FR" dirty="0" err="1"/>
+              <a:t>which</a:t>
+            </a:r>
+            <a:r>
+              <a:rPr lang="fr-FR" dirty="0"/>
+              <a:t> </a:t>
+            </a:r>
+            <a:r>
+              <a:rPr lang="fr-FR" dirty="0" err="1"/>
+              <a:t>columns</a:t>
+            </a:r>
+            <a:r>
+              <a:rPr lang="fr-FR" dirty="0"/>
+              <a:t> of the </a:t>
+            </a:r>
+            <a:r>
+              <a:rPr lang="fr-FR" dirty="0" err="1"/>
+              <a:t>dataset</a:t>
+            </a:r>
+            <a:r>
+              <a:rPr lang="fr-FR" dirty="0"/>
+              <a:t> are </a:t>
+            </a:r>
+            <a:r>
+              <a:rPr lang="fr-FR" dirty="0" err="1"/>
+              <a:t>transformed</a:t>
+            </a:r>
+            <a:r>
+              <a:rPr lang="fr-FR" dirty="0"/>
+              <a:t> </a:t>
+            </a:r>
+            <a:r>
+              <a:rPr lang="fr-FR" dirty="0" err="1"/>
+              <a:t>into</a:t>
+            </a:r>
+            <a:r>
+              <a:rPr lang="fr-FR" dirty="0"/>
+              <a:t> </a:t>
+            </a:r>
+            <a:r>
+              <a:rPr lang="fr-FR" dirty="0" err="1"/>
+              <a:t>graphical</a:t>
+            </a:r>
+            <a:r>
+              <a:rPr lang="fr-FR" dirty="0"/>
+              <a:t> </a:t>
+            </a:r>
+            <a:r>
+              <a:rPr lang="fr-FR" dirty="0" err="1"/>
+              <a:t>objects</a:t>
+            </a:r>
+            <a:endParaRPr lang="fr-FR" dirty="0"/>
+          </a:p>
+          <a:p>
+            <a:r>
+              <a:rPr lang="fr-FR" dirty="0" err="1"/>
+              <a:t>Geometries</a:t>
+            </a:r>
+            <a:r>
+              <a:rPr lang="fr-FR" dirty="0"/>
+              <a:t>: the </a:t>
+            </a:r>
+            <a:r>
+              <a:rPr lang="fr-FR" dirty="0" err="1"/>
+              <a:t>graphical</a:t>
+            </a:r>
+            <a:r>
+              <a:rPr lang="fr-FR" dirty="0"/>
+              <a:t> </a:t>
+            </a:r>
+            <a:r>
+              <a:rPr lang="fr-FR" dirty="0" err="1"/>
+              <a:t>objects</a:t>
+            </a:r>
+            <a:r>
+              <a:rPr lang="fr-FR" dirty="0"/>
+              <a:t> </a:t>
+            </a:r>
+            <a:r>
+              <a:rPr lang="fr-FR" dirty="0" err="1"/>
+              <a:t>used</a:t>
+            </a:r>
+            <a:r>
+              <a:rPr lang="fr-FR" dirty="0"/>
+              <a:t> to </a:t>
+            </a:r>
+            <a:r>
+              <a:rPr lang="fr-FR" dirty="0" err="1"/>
+              <a:t>create</a:t>
+            </a:r>
+            <a:r>
+              <a:rPr lang="fr-FR" dirty="0"/>
+              <a:t> the graph</a:t>
+            </a:r>
+          </a:p>
+          <a:p>
+            <a:r>
+              <a:rPr lang="fr-FR" dirty="0" err="1"/>
+              <a:t>Scales</a:t>
+            </a:r>
+            <a:r>
+              <a:rPr lang="fr-FR" dirty="0"/>
+              <a:t>: how the values are </a:t>
+            </a:r>
+            <a:r>
+              <a:rPr lang="fr-FR" dirty="0" err="1"/>
+              <a:t>transformed</a:t>
+            </a:r>
+            <a:endParaRPr lang="fr-FR" dirty="0"/>
+          </a:p>
+          <a:p>
+            <a:r>
+              <a:rPr lang="fr-FR" dirty="0" err="1"/>
+              <a:t>Theme</a:t>
+            </a:r>
+            <a:r>
+              <a:rPr lang="fr-FR" dirty="0"/>
+              <a:t>: </a:t>
+            </a:r>
+            <a:r>
+              <a:rPr lang="fr-FR" dirty="0" err="1"/>
+              <a:t>general</a:t>
+            </a:r>
+            <a:r>
+              <a:rPr lang="fr-FR" dirty="0"/>
+              <a:t> </a:t>
+            </a:r>
+            <a:r>
+              <a:rPr lang="fr-FR" dirty="0" err="1"/>
+              <a:t>parameters</a:t>
+            </a:r>
+            <a:endParaRPr lang="fr-FR" dirty="0"/>
+          </a:p>
+        </p:txBody>
+      </p:sp>
+    </p:spTree>
+    <p:extLst>
+      <p:ext uri="{BB962C8B-B14F-4D97-AF65-F5344CB8AC3E}">
+        <p14:creationId xmlns:p14="http://schemas.microsoft.com/office/powerpoint/2010/main" val="3615210589"/>
+      </p:ext>
+    </p:extLst>
+  </p:cSld>
+  <p:clrMapOvr>
+    <a:masterClrMapping/>
+  </p:clrMapOvr>
+</p:sld>
+</file>
+
+<file path=ppt/slides/slide14.xml><?xml version="1.0" encoding="utf-8"?>
+<p:sld xmlns:a="http://schemas.openxmlformats.org/drawingml/2006/main" xmlns:r="http://schemas.openxmlformats.org/officeDocument/2006/relationships" xmlns:p="http://schemas.openxmlformats.org/presentationml/2006/main">
+  <p:cSld>
+    <p:spTree>
+      <p:nvGrpSpPr>
+        <p:cNvPr id="1" name=""/>
+        <p:cNvGrpSpPr/>
+        <p:nvPr/>
+      </p:nvGrpSpPr>
+      <p:grpSpPr>
+        <a:xfrm>
+          <a:off x="0" y="0"/>
+          <a:ext cx="0" cy="0"/>
+          <a:chOff x="0" y="0"/>
+          <a:chExt cx="0" cy="0"/>
+        </a:xfrm>
+      </p:grpSpPr>
+      <p:sp>
+        <p:nvSpPr>
+          <p:cNvPr id="2" name="Titre 1">
+            <a:extLst>
+              <a:ext uri="{FF2B5EF4-FFF2-40B4-BE49-F238E27FC236}">
+                <a16:creationId xmlns:a16="http://schemas.microsoft.com/office/drawing/2014/main" id="{BBE6A893-1208-F72D-7183-BF5B78FFF080}"/>
+              </a:ext>
+            </a:extLst>
+          </p:cNvPr>
+          <p:cNvSpPr>
+            <a:spLocks noGrp="1"/>
+          </p:cNvSpPr>
+          <p:nvPr>
+            <p:ph type="title"/>
+          </p:nvPr>
+        </p:nvSpPr>
+        <p:spPr/>
+        <p:txBody>
+          <a:bodyPr/>
+          <a:lstStyle/>
+          <a:p>
+            <a:r>
+              <a:rPr lang="fr-FR" dirty="0" err="1"/>
+              <a:t>Exercise</a:t>
+            </a:r>
+            <a:r>
+              <a:rPr lang="fr-FR" dirty="0"/>
+              <a:t>: </a:t>
+            </a:r>
+            <a:r>
+              <a:rPr lang="fr-FR" dirty="0" err="1"/>
+              <a:t>aesthetic</a:t>
+            </a:r>
+            <a:r>
+              <a:rPr lang="fr-FR" dirty="0"/>
+              <a:t> </a:t>
+            </a:r>
+            <a:r>
+              <a:rPr lang="fr-FR" dirty="0" err="1"/>
+              <a:t>parameters</a:t>
+            </a:r>
+            <a:endParaRPr lang="fr-FR" dirty="0"/>
+          </a:p>
+        </p:txBody>
+      </p:sp>
+      <p:sp>
+        <p:nvSpPr>
+          <p:cNvPr id="3" name="Espace réservé du contenu 2">
+            <a:extLst>
+              <a:ext uri="{FF2B5EF4-FFF2-40B4-BE49-F238E27FC236}">
+                <a16:creationId xmlns:a16="http://schemas.microsoft.com/office/drawing/2014/main" id="{13890F24-1F12-F29B-7C63-526940204077}"/>
+              </a:ext>
+            </a:extLst>
+          </p:cNvPr>
+          <p:cNvSpPr>
+            <a:spLocks noGrp="1"/>
+          </p:cNvSpPr>
+          <p:nvPr>
+            <p:ph idx="1"/>
+          </p:nvPr>
+        </p:nvSpPr>
+        <p:spPr/>
+        <p:txBody>
+          <a:bodyPr/>
+          <a:lstStyle/>
+          <a:p>
+            <a:pPr marL="0" indent="0">
+              <a:buNone/>
+            </a:pPr>
+            <a:r>
+              <a:rPr lang="en-US" noProof="0" dirty="0"/>
+              <a:t>Fix the script “ggplot2_aesthetics.R”!</a:t>
+            </a:r>
+          </a:p>
+        </p:txBody>
+      </p:sp>
+    </p:spTree>
+    <p:extLst>
+      <p:ext uri="{BB962C8B-B14F-4D97-AF65-F5344CB8AC3E}">
+        <p14:creationId xmlns:p14="http://schemas.microsoft.com/office/powerpoint/2010/main" val="466365101"/>
+      </p:ext>
+    </p:extLst>
+  </p:cSld>
+  <p:clrMapOvr>
+    <a:masterClrMapping/>
+  </p:clrMapOvr>
+</p:sld>
+</file>
+
+<file path=ppt/slides/slide15.xml><?xml version="1.0" encoding="utf-8"?>
+<p:sld xmlns:a="http://schemas.openxmlformats.org/drawingml/2006/main" xmlns:r="http://schemas.openxmlformats.org/officeDocument/2006/relationships" xmlns:p="http://schemas.openxmlformats.org/presentationml/2006/main">
+  <p:cSld>
+    <p:spTree>
+      <p:nvGrpSpPr>
+        <p:cNvPr id="1" name=""/>
+        <p:cNvGrpSpPr/>
+        <p:nvPr/>
+      </p:nvGrpSpPr>
+      <p:grpSpPr>
+        <a:xfrm>
+          <a:off x="0" y="0"/>
+          <a:ext cx="0" cy="0"/>
+          <a:chOff x="0" y="0"/>
+          <a:chExt cx="0" cy="0"/>
+        </a:xfrm>
+      </p:grpSpPr>
+      <p:sp>
+        <p:nvSpPr>
+          <p:cNvPr id="2" name="Titre 1">
+            <a:extLst>
+              <a:ext uri="{FF2B5EF4-FFF2-40B4-BE49-F238E27FC236}">
+                <a16:creationId xmlns:a16="http://schemas.microsoft.com/office/drawing/2014/main" id="{C034E000-E7BA-D91B-4FD1-6970E252DCB3}"/>
+              </a:ext>
+            </a:extLst>
+          </p:cNvPr>
+          <p:cNvSpPr>
+            <a:spLocks noGrp="1"/>
+          </p:cNvSpPr>
+          <p:nvPr>
+            <p:ph type="title"/>
+          </p:nvPr>
+        </p:nvSpPr>
+        <p:spPr/>
+        <p:txBody>
+          <a:bodyPr/>
+          <a:lstStyle/>
+          <a:p>
+            <a:r>
+              <a:rPr lang="fr-FR" dirty="0" err="1"/>
+              <a:t>Exercise</a:t>
+            </a:r>
+            <a:r>
+              <a:rPr lang="fr-FR" dirty="0"/>
+              <a:t>: </a:t>
+            </a:r>
+            <a:r>
+              <a:rPr lang="fr-FR" dirty="0" err="1"/>
+              <a:t>be</a:t>
+            </a:r>
+            <a:r>
+              <a:rPr lang="fr-FR" dirty="0"/>
+              <a:t> </a:t>
+            </a:r>
+            <a:r>
+              <a:rPr lang="fr-FR" dirty="0" err="1"/>
+              <a:t>creative</a:t>
+            </a:r>
+            <a:r>
+              <a:rPr lang="fr-FR" dirty="0"/>
+              <a:t>!</a:t>
+            </a:r>
+          </a:p>
+        </p:txBody>
+      </p:sp>
+      <p:sp>
+        <p:nvSpPr>
+          <p:cNvPr id="3" name="Espace réservé du contenu 2">
+            <a:extLst>
+              <a:ext uri="{FF2B5EF4-FFF2-40B4-BE49-F238E27FC236}">
+                <a16:creationId xmlns:a16="http://schemas.microsoft.com/office/drawing/2014/main" id="{D3A65CE5-88AC-E564-BAD1-152BACF915A4}"/>
+              </a:ext>
+            </a:extLst>
+          </p:cNvPr>
+          <p:cNvSpPr>
+            <a:spLocks noGrp="1"/>
+          </p:cNvSpPr>
+          <p:nvPr>
+            <p:ph idx="1"/>
+          </p:nvPr>
+        </p:nvSpPr>
+        <p:spPr/>
+        <p:txBody>
+          <a:bodyPr/>
+          <a:lstStyle/>
+          <a:p>
+            <a:pPr marL="0" indent="0">
+              <a:buNone/>
+            </a:pPr>
+            <a:r>
+              <a:rPr lang="fr-FR" dirty="0" err="1"/>
+              <a:t>What</a:t>
+            </a:r>
+            <a:r>
+              <a:rPr lang="fr-FR" dirty="0"/>
+              <a:t> do </a:t>
+            </a:r>
+            <a:r>
+              <a:rPr lang="fr-FR" dirty="0" err="1"/>
+              <a:t>you</a:t>
+            </a:r>
+            <a:r>
+              <a:rPr lang="fr-FR" dirty="0"/>
+              <a:t> </a:t>
+            </a:r>
+            <a:r>
+              <a:rPr lang="fr-FR" dirty="0" err="1"/>
+              <a:t>want</a:t>
+            </a:r>
+            <a:r>
+              <a:rPr lang="fr-FR" dirty="0"/>
+              <a:t> to plot </a:t>
+            </a:r>
+            <a:r>
+              <a:rPr lang="fr-FR" dirty="0" err="1"/>
+              <a:t>from</a:t>
+            </a:r>
+            <a:r>
+              <a:rPr lang="fr-FR" dirty="0"/>
+              <a:t> the COVID </a:t>
+            </a:r>
+            <a:r>
+              <a:rPr lang="fr-FR" dirty="0" err="1"/>
+              <a:t>dataset</a:t>
+            </a:r>
+            <a:r>
+              <a:rPr lang="fr-FR" dirty="0"/>
+              <a:t>?</a:t>
+            </a:r>
+          </a:p>
+        </p:txBody>
+      </p:sp>
+    </p:spTree>
+    <p:extLst>
+      <p:ext uri="{BB962C8B-B14F-4D97-AF65-F5344CB8AC3E}">
+        <p14:creationId xmlns:p14="http://schemas.microsoft.com/office/powerpoint/2010/main" val="3076119867"/>
+      </p:ext>
+    </p:extLst>
+  </p:cSld>
+  <p:clrMapOvr>
+    <a:masterClrMapping/>
+  </p:clrMapOvr>
+</p:sld>
+</file>
+
+<file path=ppt/slides/slide16.xml><?xml version="1.0" encoding="utf-8"?>
+<p:sld xmlns:a="http://schemas.openxmlformats.org/drawingml/2006/main" xmlns:r="http://schemas.openxmlformats.org/officeDocument/2006/relationships" xmlns:p="http://schemas.openxmlformats.org/presentationml/2006/main">
+  <p:cSld>
+    <p:spTree>
+      <p:nvGrpSpPr>
+        <p:cNvPr id="1" name=""/>
+        <p:cNvGrpSpPr/>
+        <p:nvPr/>
+      </p:nvGrpSpPr>
+      <p:grpSpPr>
+        <a:xfrm>
+          <a:off x="0" y="0"/>
+          <a:ext cx="0" cy="0"/>
+          <a:chOff x="0" y="0"/>
+          <a:chExt cx="0" cy="0"/>
+        </a:xfrm>
+      </p:grpSpPr>
+      <p:sp>
+        <p:nvSpPr>
+          <p:cNvPr id="4" name="Titre 3">
+            <a:extLst>
+              <a:ext uri="{FF2B5EF4-FFF2-40B4-BE49-F238E27FC236}">
+                <a16:creationId xmlns:a16="http://schemas.microsoft.com/office/drawing/2014/main" id="{B1083C53-496B-C69F-40D2-A795491A2520}"/>
+              </a:ext>
+            </a:extLst>
+          </p:cNvPr>
+          <p:cNvSpPr>
+            <a:spLocks noGrp="1"/>
+          </p:cNvSpPr>
+          <p:nvPr>
+            <p:ph type="title"/>
+          </p:nvPr>
+        </p:nvSpPr>
+        <p:spPr/>
+        <p:txBody>
+          <a:bodyPr/>
+          <a:lstStyle/>
+          <a:p>
+            <a:r>
+              <a:rPr lang="fr-FR" dirty="0"/>
+              <a:t>Conclusion</a:t>
+            </a:r>
+          </a:p>
+        </p:txBody>
+      </p:sp>
+      <p:sp>
+        <p:nvSpPr>
+          <p:cNvPr id="5" name="Espace réservé du texte 4">
+            <a:extLst>
+              <a:ext uri="{FF2B5EF4-FFF2-40B4-BE49-F238E27FC236}">
+                <a16:creationId xmlns:a16="http://schemas.microsoft.com/office/drawing/2014/main" id="{327C2648-607F-AABA-9304-3FE902479153}"/>
+              </a:ext>
+            </a:extLst>
+          </p:cNvPr>
+          <p:cNvSpPr>
+            <a:spLocks noGrp="1"/>
+          </p:cNvSpPr>
+          <p:nvPr>
+            <p:ph type="body" idx="1"/>
+          </p:nvPr>
+        </p:nvSpPr>
+        <p:spPr/>
+        <p:txBody>
+          <a:bodyPr/>
+          <a:lstStyle/>
+          <a:p>
+            <a:r>
+              <a:rPr lang="fr-FR" dirty="0" err="1"/>
+              <a:t>Visualizing</a:t>
+            </a:r>
+            <a:r>
+              <a:rPr lang="fr-FR" dirty="0"/>
+              <a:t> data </a:t>
+            </a:r>
+            <a:r>
+              <a:rPr lang="fr-FR" dirty="0" err="1"/>
+              <a:t>is</a:t>
+            </a:r>
+            <a:r>
+              <a:rPr lang="fr-FR" dirty="0"/>
+              <a:t> a </a:t>
+            </a:r>
+            <a:r>
+              <a:rPr lang="fr-FR" dirty="0" err="1"/>
+              <a:t>complex</a:t>
+            </a:r>
+            <a:r>
+              <a:rPr lang="fr-FR" dirty="0"/>
+              <a:t> and </a:t>
+            </a:r>
+            <a:r>
+              <a:rPr lang="fr-FR" dirty="0" err="1"/>
+              <a:t>iterative</a:t>
+            </a:r>
+            <a:r>
+              <a:rPr lang="fr-FR" dirty="0"/>
+              <a:t> process!</a:t>
+            </a:r>
+          </a:p>
+          <a:p>
+            <a:r>
+              <a:rPr lang="fr-FR" dirty="0"/>
+              <a:t>Know </a:t>
+            </a:r>
+            <a:r>
+              <a:rPr lang="fr-FR" dirty="0" err="1"/>
+              <a:t>your</a:t>
+            </a:r>
+            <a:r>
+              <a:rPr lang="fr-FR" dirty="0"/>
+              <a:t> </a:t>
+            </a:r>
+            <a:r>
+              <a:rPr lang="fr-FR" dirty="0" err="1"/>
+              <a:t>limits</a:t>
+            </a:r>
+            <a:r>
+              <a:rPr lang="fr-FR" dirty="0"/>
+              <a:t>, </a:t>
+            </a:r>
+            <a:r>
+              <a:rPr lang="fr-FR" dirty="0" err="1"/>
+              <a:t>don’t</a:t>
+            </a:r>
+            <a:r>
+              <a:rPr lang="fr-FR" dirty="0"/>
+              <a:t> </a:t>
+            </a:r>
+            <a:r>
+              <a:rPr lang="fr-FR" dirty="0" err="1"/>
+              <a:t>forget</a:t>
+            </a:r>
+            <a:r>
+              <a:rPr lang="fr-FR" dirty="0"/>
+              <a:t> </a:t>
+            </a:r>
+            <a:r>
+              <a:rPr lang="fr-FR" dirty="0" err="1"/>
+              <a:t>your</a:t>
+            </a:r>
+            <a:r>
+              <a:rPr lang="fr-FR" dirty="0"/>
+              <a:t> favorite </a:t>
+            </a:r>
+            <a:r>
+              <a:rPr lang="fr-FR" dirty="0" err="1"/>
+              <a:t>tools</a:t>
+            </a:r>
+            <a:r>
+              <a:rPr lang="fr-FR" dirty="0"/>
+              <a:t>, </a:t>
+            </a:r>
+            <a:r>
+              <a:rPr lang="fr-FR" dirty="0" err="1"/>
+              <a:t>get</a:t>
+            </a:r>
+            <a:r>
+              <a:rPr lang="fr-FR" dirty="0"/>
+              <a:t> inspiration.</a:t>
+            </a:r>
+          </a:p>
+        </p:txBody>
+      </p:sp>
+    </p:spTree>
+    <p:extLst>
+      <p:ext uri="{BB962C8B-B14F-4D97-AF65-F5344CB8AC3E}">
+        <p14:creationId xmlns:p14="http://schemas.microsoft.com/office/powerpoint/2010/main" val="2094196428"/>
+      </p:ext>
+    </p:extLst>
+  </p:cSld>
+  <p:clrMapOvr>
+    <a:masterClrMapping/>
+  </p:clrMapOvr>
+</p:sld>
+</file>
+
 <file path=ppt/slides/slide2.xml><?xml version="1.0" encoding="utf-8"?>
 <p:sld xmlns:a="http://schemas.openxmlformats.org/drawingml/2006/main" xmlns:r="http://schemas.openxmlformats.org/officeDocument/2006/relationships" xmlns:p="http://schemas.openxmlformats.org/presentationml/2006/main">
   <p:cSld>
@@ -3722,7 +5364,7 @@
           <p:cNvPr id="2" name="Titre 1">
             <a:extLst>
               <a:ext uri="{FF2B5EF4-FFF2-40B4-BE49-F238E27FC236}">
-                <a16:creationId xmlns:a16="http://schemas.microsoft.com/office/drawing/2014/main" id="{5978A548-EBC5-5C35-B789-BC3DE60F5467}"/>
+                <a16:creationId xmlns:a16="http://schemas.microsoft.com/office/drawing/2014/main" id="{19230AAE-1F25-35B0-4F3D-5F86CBEB518A}"/>
               </a:ext>
             </a:extLst>
           </p:cNvPr>
@@ -3740,57 +5382,1902 @@
           <a:p>
             <a:r>
               <a:rPr lang="fr-FR" dirty="0" err="1"/>
-              <a:t>Barplot</a:t>
+              <a:t>From</a:t>
             </a:r>
             <a:r>
               <a:rPr lang="fr-FR" dirty="0"/>
-              <a:t> of the </a:t>
+              <a:t> data-to-</a:t>
             </a:r>
             <a:r>
               <a:rPr lang="fr-FR" dirty="0" err="1"/>
-              <a:t>number</a:t>
-            </a:r>
+              <a:t>viz</a:t>
+            </a:r>
+            <a:endParaRPr lang="fr-FR" dirty="0"/>
+          </a:p>
+        </p:txBody>
+      </p:sp>
+      <p:sp>
+        <p:nvSpPr>
+          <p:cNvPr id="3" name="Espace réservé du contenu 2">
+            <a:extLst>
+              <a:ext uri="{FF2B5EF4-FFF2-40B4-BE49-F238E27FC236}">
+                <a16:creationId xmlns:a16="http://schemas.microsoft.com/office/drawing/2014/main" id="{F4773417-75A5-E3EE-A590-83FE694630EC}"/>
+              </a:ext>
+            </a:extLst>
+          </p:cNvPr>
+          <p:cNvSpPr>
+            <a:spLocks noGrp="1"/>
+          </p:cNvSpPr>
+          <p:nvPr>
+            <p:ph idx="1"/>
+          </p:nvPr>
+        </p:nvSpPr>
+        <p:spPr/>
+        <p:txBody>
+          <a:bodyPr/>
+          <a:lstStyle/>
+          <a:p>
+            <a:pPr marL="0" indent="0">
+              <a:buNone/>
+            </a:pPr>
             <a:r>
               <a:rPr lang="fr-FR" dirty="0"/>
-              <a:t> of observations per </a:t>
+              <a:t>To </a:t>
             </a:r>
             <a:r>
               <a:rPr lang="fr-FR" dirty="0" err="1"/>
-              <a:t>subjects</a:t>
+              <a:t>get</a:t>
+            </a:r>
+            <a:r>
+              <a:rPr lang="fr-FR" dirty="0"/>
+              <a:t> </a:t>
+            </a:r>
+            <a:r>
+              <a:rPr lang="fr-FR" dirty="0" err="1"/>
+              <a:t>some</a:t>
+            </a:r>
+            <a:r>
+              <a:rPr lang="fr-FR" dirty="0"/>
+              <a:t> </a:t>
+            </a:r>
+            <a:r>
+              <a:rPr lang="fr-FR" dirty="0" err="1"/>
+              <a:t>graphical</a:t>
+            </a:r>
+            <a:r>
+              <a:rPr lang="fr-FR" dirty="0"/>
+              <a:t> insights</a:t>
+            </a:r>
+          </a:p>
+          <a:p>
+            <a:pPr marL="0" indent="0">
+              <a:buNone/>
+            </a:pPr>
+            <a:r>
+              <a:rPr lang="fr-FR" dirty="0">
+                <a:hlinkClick r:id="rId2"/>
+              </a:rPr>
+              <a:t>https://www.data-to-viz.com/</a:t>
             </a:r>
             <a:endParaRPr lang="fr-FR" dirty="0"/>
           </a:p>
-        </p:txBody>
-      </p:sp>
-      <p:sp>
-        <p:nvSpPr>
-          <p:cNvPr id="3" name="Espace réservé du contenu 2">
-            <a:extLst>
-              <a:ext uri="{FF2B5EF4-FFF2-40B4-BE49-F238E27FC236}">
-                <a16:creationId xmlns:a16="http://schemas.microsoft.com/office/drawing/2014/main" id="{3A8B06FF-C72E-5848-AFC1-F653DA97E3ED}"/>
-              </a:ext>
-            </a:extLst>
-          </p:cNvPr>
-          <p:cNvSpPr>
-            <a:spLocks noGrp="1"/>
-          </p:cNvSpPr>
-          <p:nvPr>
-            <p:ph idx="1"/>
-          </p:nvPr>
-        </p:nvSpPr>
-        <p:spPr/>
-        <p:txBody>
-          <a:bodyPr/>
-          <a:lstStyle/>
-          <a:p>
-            <a:endParaRPr lang="fr-FR"/>
-          </a:p>
-        </p:txBody>
-      </p:sp>
+          <a:p>
+            <a:pPr marL="0" indent="0">
+              <a:buNone/>
+            </a:pPr>
+            <a:r>
+              <a:rPr lang="fr-FR" dirty="0"/>
+              <a:t> </a:t>
+            </a:r>
+          </a:p>
+        </p:txBody>
+      </p:sp>
+      <p:pic>
+        <p:nvPicPr>
+          <p:cNvPr id="4" name="Image 3">
+            <a:extLst>
+              <a:ext uri="{FF2B5EF4-FFF2-40B4-BE49-F238E27FC236}">
+                <a16:creationId xmlns:a16="http://schemas.microsoft.com/office/drawing/2014/main" id="{9F2927CA-CE54-EBB9-B4EE-E4ABC01CDD0A}"/>
+              </a:ext>
+            </a:extLst>
+          </p:cNvPr>
+          <p:cNvPicPr>
+            <a:picLocks noChangeAspect="1"/>
+          </p:cNvPicPr>
+          <p:nvPr/>
+        </p:nvPicPr>
+        <p:blipFill>
+          <a:blip r:embed="rId3"/>
+          <a:stretch>
+            <a:fillRect/>
+          </a:stretch>
+        </p:blipFill>
+        <p:spPr>
+          <a:xfrm>
+            <a:off x="5983324" y="681037"/>
+            <a:ext cx="5499100" cy="5486400"/>
+          </a:xfrm>
+          <a:prstGeom prst="rect">
+            <a:avLst/>
+          </a:prstGeom>
+        </p:spPr>
+      </p:pic>
     </p:spTree>
     <p:extLst>
       <p:ext uri="{BB962C8B-B14F-4D97-AF65-F5344CB8AC3E}">
-        <p14:creationId xmlns:p14="http://schemas.microsoft.com/office/powerpoint/2010/main" val="644533055"/>
+        <p14:creationId xmlns:p14="http://schemas.microsoft.com/office/powerpoint/2010/main" val="360108645"/>
+      </p:ext>
+    </p:extLst>
+  </p:cSld>
+  <p:clrMapOvr>
+    <a:masterClrMapping/>
+  </p:clrMapOvr>
+</p:sld>
+</file>
+
+<file path=ppt/slides/slide6.xml><?xml version="1.0" encoding="utf-8"?>
+<p:sld xmlns:a="http://schemas.openxmlformats.org/drawingml/2006/main" xmlns:r="http://schemas.openxmlformats.org/officeDocument/2006/relationships" xmlns:p="http://schemas.openxmlformats.org/presentationml/2006/main">
+  <p:cSld>
+    <p:spTree>
+      <p:nvGrpSpPr>
+        <p:cNvPr id="1" name=""/>
+        <p:cNvGrpSpPr/>
+        <p:nvPr/>
+      </p:nvGrpSpPr>
+      <p:grpSpPr>
+        <a:xfrm>
+          <a:off x="0" y="0"/>
+          <a:ext cx="0" cy="0"/>
+          <a:chOff x="0" y="0"/>
+          <a:chExt cx="0" cy="0"/>
+        </a:xfrm>
+      </p:grpSpPr>
+      <p:sp>
+        <p:nvSpPr>
+          <p:cNvPr id="2" name="Title 1"/>
+          <p:cNvSpPr>
+            <a:spLocks noGrp="1"/>
+          </p:cNvSpPr>
+          <p:nvPr>
+            <p:ph type="title"/>
+          </p:nvPr>
+        </p:nvSpPr>
+        <p:spPr/>
+        <p:txBody>
+          <a:bodyPr>
+            <a:normAutofit/>
+          </a:bodyPr>
+          <a:lstStyle/>
+          <a:p>
+            <a:r>
+              <a:t>Barplot of the number of observations per subject</a:t>
+            </a:r>
+          </a:p>
+        </p:txBody>
+      </p:sp>
+      <p:sp>
+        <p:nvSpPr>
+          <p:cNvPr id="4" name="Text Placeholder 3"/>
+          <p:cNvSpPr>
+            <a:spLocks noGrp="1"/>
+          </p:cNvSpPr>
+          <p:nvPr>
+            <p:ph idx="1"/>
+          </p:nvPr>
+        </p:nvSpPr>
+        <p:spPr/>
+        <p:txBody>
+          <a:bodyPr/>
+          <a:lstStyle/>
+          <a:p>
+            <a:pPr marL="0" indent="0">
+              <a:buNone/>
+            </a:pPr>
+            <a:r>
+              <a:rPr dirty="0">
+                <a:solidFill>
+                  <a:srgbClr val="003B4F"/>
+                </a:solidFill>
+                <a:latin typeface="Courier"/>
+              </a:rPr>
+              <a:t>covid </a:t>
+            </a:r>
+            <a:r>
+              <a:rPr dirty="0">
+                <a:solidFill>
+                  <a:srgbClr val="5E5E5E"/>
+                </a:solidFill>
+                <a:latin typeface="Courier"/>
+              </a:rPr>
+              <a:t>|&gt;</a:t>
+            </a:r>
+            <a:br>
+              <a:rPr dirty="0"/>
+            </a:br>
+            <a:r>
+              <a:rPr dirty="0">
+                <a:solidFill>
+                  <a:srgbClr val="003B4F"/>
+                </a:solidFill>
+                <a:latin typeface="Courier"/>
+              </a:rPr>
+              <a:t>  </a:t>
+            </a:r>
+            <a:r>
+              <a:rPr dirty="0" err="1">
+                <a:solidFill>
+                  <a:srgbClr val="4758AB"/>
+                </a:solidFill>
+                <a:latin typeface="Courier"/>
+              </a:rPr>
+              <a:t>ggplot</a:t>
+            </a:r>
+            <a:r>
+              <a:rPr dirty="0">
+                <a:solidFill>
+                  <a:srgbClr val="003B4F"/>
+                </a:solidFill>
+                <a:latin typeface="Courier"/>
+              </a:rPr>
+              <a:t>(</a:t>
+            </a:r>
+            <a:r>
+              <a:rPr dirty="0" err="1">
+                <a:solidFill>
+                  <a:srgbClr val="4758AB"/>
+                </a:solidFill>
+                <a:latin typeface="Courier"/>
+              </a:rPr>
+              <a:t>aes</a:t>
+            </a:r>
+            <a:r>
+              <a:rPr dirty="0">
+                <a:solidFill>
+                  <a:srgbClr val="003B4F"/>
+                </a:solidFill>
+                <a:latin typeface="Courier"/>
+              </a:rPr>
+              <a:t>(</a:t>
+            </a:r>
+            <a:r>
+              <a:rPr lang="fr-FR" dirty="0">
+                <a:solidFill>
+                  <a:srgbClr val="657422"/>
+                </a:solidFill>
+                <a:latin typeface="Courier"/>
+              </a:rPr>
+              <a:t>x = </a:t>
+            </a:r>
+            <a:r>
+              <a:rPr dirty="0">
+                <a:solidFill>
+                  <a:srgbClr val="003B4F"/>
+                </a:solidFill>
+                <a:latin typeface="Courier"/>
+              </a:rPr>
+              <a:t>id, </a:t>
+            </a:r>
+            <a:r>
+              <a:rPr dirty="0">
+                <a:solidFill>
+                  <a:srgbClr val="657422"/>
+                </a:solidFill>
+                <a:latin typeface="Courier"/>
+              </a:rPr>
+              <a:t>fill =</a:t>
+            </a:r>
+            <a:r>
+              <a:rPr dirty="0">
+                <a:solidFill>
+                  <a:srgbClr val="003B4F"/>
+                </a:solidFill>
+                <a:latin typeface="Courier"/>
+              </a:rPr>
+              <a:t> id)) </a:t>
+            </a:r>
+            <a:r>
+              <a:rPr dirty="0">
+                <a:solidFill>
+                  <a:srgbClr val="5E5E5E"/>
+                </a:solidFill>
+                <a:latin typeface="Courier"/>
+              </a:rPr>
+              <a:t>+</a:t>
+            </a:r>
+            <a:r>
+              <a:rPr dirty="0">
+                <a:solidFill>
+                  <a:srgbClr val="003B4F"/>
+                </a:solidFill>
+                <a:latin typeface="Courier"/>
+              </a:rPr>
+              <a:t> </a:t>
+            </a:r>
+            <a:br>
+              <a:rPr dirty="0"/>
+            </a:br>
+            <a:r>
+              <a:rPr dirty="0">
+                <a:solidFill>
+                  <a:srgbClr val="003B4F"/>
+                </a:solidFill>
+                <a:latin typeface="Courier"/>
+              </a:rPr>
+              <a:t>  </a:t>
+            </a:r>
+            <a:r>
+              <a:rPr dirty="0" err="1">
+                <a:solidFill>
+                  <a:srgbClr val="4758AB"/>
+                </a:solidFill>
+                <a:latin typeface="Courier"/>
+              </a:rPr>
+              <a:t>geom_bar</a:t>
+            </a:r>
+            <a:r>
+              <a:rPr dirty="0">
+                <a:solidFill>
+                  <a:srgbClr val="003B4F"/>
+                </a:solidFill>
+                <a:latin typeface="Courier"/>
+              </a:rPr>
+              <a:t>()</a:t>
+            </a:r>
+          </a:p>
+        </p:txBody>
+      </p:sp>
+      <p:pic>
+        <p:nvPicPr>
+          <p:cNvPr id="3" name="Picture 1" descr="99_slides_with_code_files/figure-pptx/unnamed-chunk-3-1.png"/>
+          <p:cNvPicPr>
+            <a:picLocks noGrp="1" noChangeAspect="1"/>
+          </p:cNvPicPr>
+          <p:nvPr/>
+        </p:nvPicPr>
+        <p:blipFill>
+          <a:blip r:embed="rId2"/>
+          <a:stretch>
+            <a:fillRect/>
+          </a:stretch>
+        </p:blipFill>
+        <p:spPr bwMode="auto">
+          <a:xfrm>
+            <a:off x="4120313" y="2773363"/>
+            <a:ext cx="6807200" cy="3403600"/>
+          </a:xfrm>
+          <a:prstGeom prst="rect">
+            <a:avLst/>
+          </a:prstGeom>
+          <a:noFill/>
+          <a:ln w="9525">
+            <a:noFill/>
+            <a:headEnd/>
+            <a:tailEnd/>
+          </a:ln>
+        </p:spPr>
+      </p:pic>
+    </p:spTree>
+  </p:cSld>
+  <p:clrMapOvr>
+    <a:masterClrMapping/>
+  </p:clrMapOvr>
+</p:sld>
+</file>
+
+<file path=ppt/slides/slide7.xml><?xml version="1.0" encoding="utf-8"?>
+<p:sld xmlns:a="http://schemas.openxmlformats.org/drawingml/2006/main" xmlns:r="http://schemas.openxmlformats.org/officeDocument/2006/relationships" xmlns:p="http://schemas.openxmlformats.org/presentationml/2006/main">
+  <p:cSld>
+    <p:spTree>
+      <p:nvGrpSpPr>
+        <p:cNvPr id="1" name="">
+          <a:extLst>
+            <a:ext uri="{FF2B5EF4-FFF2-40B4-BE49-F238E27FC236}">
+              <a16:creationId xmlns:a16="http://schemas.microsoft.com/office/drawing/2014/main" id="{DC1225B1-C7FA-373B-F8E5-5DBC720930CA}"/>
+            </a:ext>
+          </a:extLst>
+        </p:cNvPr>
+        <p:cNvGrpSpPr/>
+        <p:nvPr/>
+      </p:nvGrpSpPr>
+      <p:grpSpPr>
+        <a:xfrm>
+          <a:off x="0" y="0"/>
+          <a:ext cx="0" cy="0"/>
+          <a:chOff x="0" y="0"/>
+          <a:chExt cx="0" cy="0"/>
+        </a:xfrm>
+      </p:grpSpPr>
+      <p:sp>
+        <p:nvSpPr>
+          <p:cNvPr id="2" name="Title 1">
+            <a:extLst>
+              <a:ext uri="{FF2B5EF4-FFF2-40B4-BE49-F238E27FC236}">
+                <a16:creationId xmlns:a16="http://schemas.microsoft.com/office/drawing/2014/main" id="{8B124E23-0483-25DA-E651-84C5C0687910}"/>
+              </a:ext>
+            </a:extLst>
+          </p:cNvPr>
+          <p:cNvSpPr>
+            <a:spLocks noGrp="1"/>
+          </p:cNvSpPr>
+          <p:nvPr>
+            <p:ph type="title"/>
+          </p:nvPr>
+        </p:nvSpPr>
+        <p:spPr/>
+        <p:txBody>
+          <a:bodyPr>
+            <a:normAutofit/>
+          </a:bodyPr>
+          <a:lstStyle/>
+          <a:p>
+            <a:r>
+              <a:t>Barplot of the number of observations per subject</a:t>
+            </a:r>
+          </a:p>
+        </p:txBody>
+      </p:sp>
+      <p:sp>
+        <p:nvSpPr>
+          <p:cNvPr id="5" name="Légende encadrée 2 4">
+            <a:extLst>
+              <a:ext uri="{FF2B5EF4-FFF2-40B4-BE49-F238E27FC236}">
+                <a16:creationId xmlns:a16="http://schemas.microsoft.com/office/drawing/2014/main" id="{E3A0DF76-BBC1-0A7C-20C6-676A527323D2}"/>
+              </a:ext>
+            </a:extLst>
+          </p:cNvPr>
+          <p:cNvSpPr/>
+          <p:nvPr/>
+        </p:nvSpPr>
+        <p:spPr>
+          <a:xfrm>
+            <a:off x="5961320" y="1526955"/>
+            <a:ext cx="1983859" cy="612648"/>
+          </a:xfrm>
+          <a:prstGeom prst="borderCallout2">
+            <a:avLst>
+              <a:gd name="adj1" fmla="val 39576"/>
+              <a:gd name="adj2" fmla="val -4581"/>
+              <a:gd name="adj3" fmla="val 62137"/>
+              <a:gd name="adj4" fmla="val -62536"/>
+              <a:gd name="adj5" fmla="val 195804"/>
+              <a:gd name="adj6" fmla="val -89812"/>
+            </a:avLst>
+          </a:prstGeom>
+        </p:spPr>
+        <p:style>
+          <a:lnRef idx="2">
+            <a:schemeClr val="accent1">
+              <a:shade val="15000"/>
+            </a:schemeClr>
+          </a:lnRef>
+          <a:fillRef idx="1">
+            <a:schemeClr val="accent1"/>
+          </a:fillRef>
+          <a:effectRef idx="0">
+            <a:schemeClr val="accent1"/>
+          </a:effectRef>
+          <a:fontRef idx="minor">
+            <a:schemeClr val="lt1"/>
+          </a:fontRef>
+        </p:style>
+        <p:txBody>
+          <a:bodyPr rtlCol="0" anchor="ctr"/>
+          <a:lstStyle/>
+          <a:p>
+            <a:pPr algn="ctr"/>
+            <a:r>
+              <a:rPr lang="fr-FR" dirty="0"/>
+              <a:t>Use </a:t>
+            </a:r>
+            <a:r>
+              <a:rPr lang="fr-FR" dirty="0" err="1"/>
+              <a:t>your</a:t>
+            </a:r>
+            <a:r>
+              <a:rPr lang="fr-FR" dirty="0"/>
+              <a:t> favorite pipe</a:t>
+            </a:r>
+          </a:p>
+        </p:txBody>
+      </p:sp>
+      <p:sp>
+        <p:nvSpPr>
+          <p:cNvPr id="6" name="Accolade fermante 5">
+            <a:extLst>
+              <a:ext uri="{FF2B5EF4-FFF2-40B4-BE49-F238E27FC236}">
+                <a16:creationId xmlns:a16="http://schemas.microsoft.com/office/drawing/2014/main" id="{16637B95-15C0-573E-C6EA-CA09C038252F}"/>
+              </a:ext>
+            </a:extLst>
+          </p:cNvPr>
+          <p:cNvSpPr/>
+          <p:nvPr/>
+        </p:nvSpPr>
+        <p:spPr>
+          <a:xfrm rot="5400000">
+            <a:off x="7248267" y="2128453"/>
+            <a:ext cx="230657" cy="3634946"/>
+          </a:xfrm>
+          <a:prstGeom prst="rightBrace">
+            <a:avLst/>
+          </a:prstGeom>
+        </p:spPr>
+        <p:style>
+          <a:lnRef idx="2">
+            <a:schemeClr val="accent1"/>
+          </a:lnRef>
+          <a:fillRef idx="0">
+            <a:schemeClr val="accent1"/>
+          </a:fillRef>
+          <a:effectRef idx="1">
+            <a:schemeClr val="accent1"/>
+          </a:effectRef>
+          <a:fontRef idx="minor">
+            <a:schemeClr val="tx1"/>
+          </a:fontRef>
+        </p:style>
+        <p:txBody>
+          <a:bodyPr rtlCol="0" anchor="ctr"/>
+          <a:lstStyle/>
+          <a:p>
+            <a:pPr algn="ctr"/>
+            <a:endParaRPr lang="fr-FR"/>
+          </a:p>
+        </p:txBody>
+      </p:sp>
+      <p:sp>
+        <p:nvSpPr>
+          <p:cNvPr id="7" name="Rectangle 6">
+            <a:extLst>
+              <a:ext uri="{FF2B5EF4-FFF2-40B4-BE49-F238E27FC236}">
+                <a16:creationId xmlns:a16="http://schemas.microsoft.com/office/drawing/2014/main" id="{7736B52A-CA09-C1FC-197A-C016BA473043}"/>
+              </a:ext>
+            </a:extLst>
+          </p:cNvPr>
+          <p:cNvSpPr/>
+          <p:nvPr/>
+        </p:nvSpPr>
+        <p:spPr>
+          <a:xfrm>
+            <a:off x="6046572" y="4142604"/>
+            <a:ext cx="2644873" cy="469557"/>
+          </a:xfrm>
+          <a:prstGeom prst="rect">
+            <a:avLst/>
+          </a:prstGeom>
+        </p:spPr>
+        <p:style>
+          <a:lnRef idx="2">
+            <a:schemeClr val="accent1">
+              <a:shade val="15000"/>
+            </a:schemeClr>
+          </a:lnRef>
+          <a:fillRef idx="1">
+            <a:schemeClr val="accent1"/>
+          </a:fillRef>
+          <a:effectRef idx="0">
+            <a:schemeClr val="accent1"/>
+          </a:effectRef>
+          <a:fontRef idx="minor">
+            <a:schemeClr val="lt1"/>
+          </a:fontRef>
+        </p:style>
+        <p:txBody>
+          <a:bodyPr rtlCol="0" anchor="ctr"/>
+          <a:lstStyle/>
+          <a:p>
+            <a:pPr algn="ctr"/>
+            <a:r>
+              <a:rPr lang="fr-FR" dirty="0" err="1"/>
+              <a:t>Aesthetic</a:t>
+            </a:r>
+            <a:r>
+              <a:rPr lang="fr-FR" dirty="0"/>
+              <a:t> </a:t>
+            </a:r>
+            <a:r>
+              <a:rPr lang="fr-FR" dirty="0" err="1"/>
+              <a:t>parameters</a:t>
+            </a:r>
+            <a:endParaRPr lang="fr-FR" dirty="0"/>
+          </a:p>
+        </p:txBody>
+      </p:sp>
+      <p:sp>
+        <p:nvSpPr>
+          <p:cNvPr id="9" name="ZoneTexte 8">
+            <a:extLst>
+              <a:ext uri="{FF2B5EF4-FFF2-40B4-BE49-F238E27FC236}">
+                <a16:creationId xmlns:a16="http://schemas.microsoft.com/office/drawing/2014/main" id="{0757E3CE-F1EE-E3F1-7A3D-9C8EFBA34DCB}"/>
+              </a:ext>
+            </a:extLst>
+          </p:cNvPr>
+          <p:cNvSpPr txBox="1"/>
+          <p:nvPr/>
+        </p:nvSpPr>
+        <p:spPr>
+          <a:xfrm>
+            <a:off x="1957502" y="2593480"/>
+            <a:ext cx="3158195" cy="646331"/>
+          </a:xfrm>
+          <a:prstGeom prst="rect">
+            <a:avLst/>
+          </a:prstGeom>
+          <a:noFill/>
+        </p:spPr>
+        <p:txBody>
+          <a:bodyPr wrap="square">
+            <a:spAutoFit/>
+          </a:bodyPr>
+          <a:lstStyle/>
+          <a:p>
+            <a:r>
+              <a:rPr lang="fr-FR" sz="3600" dirty="0">
+                <a:solidFill>
+                  <a:srgbClr val="003B4F"/>
+                </a:solidFill>
+                <a:latin typeface="Courier"/>
+              </a:rPr>
+              <a:t>covid </a:t>
+            </a:r>
+            <a:r>
+              <a:rPr lang="fr-FR" sz="3600" dirty="0">
+                <a:solidFill>
+                  <a:srgbClr val="5E5E5E"/>
+                </a:solidFill>
+                <a:latin typeface="Courier"/>
+              </a:rPr>
+              <a:t>|&gt;</a:t>
+            </a:r>
+            <a:endParaRPr lang="fr-FR" sz="3600" dirty="0"/>
+          </a:p>
+        </p:txBody>
+      </p:sp>
+      <p:sp>
+        <p:nvSpPr>
+          <p:cNvPr id="11" name="ZoneTexte 10">
+            <a:extLst>
+              <a:ext uri="{FF2B5EF4-FFF2-40B4-BE49-F238E27FC236}">
+                <a16:creationId xmlns:a16="http://schemas.microsoft.com/office/drawing/2014/main" id="{1B05BF5B-1E8A-5C87-C70F-34797ED744C5}"/>
+              </a:ext>
+            </a:extLst>
+          </p:cNvPr>
+          <p:cNvSpPr txBox="1"/>
+          <p:nvPr/>
+        </p:nvSpPr>
+        <p:spPr>
+          <a:xfrm>
+            <a:off x="2381765" y="3319153"/>
+            <a:ext cx="9142970" cy="646331"/>
+          </a:xfrm>
+          <a:prstGeom prst="rect">
+            <a:avLst/>
+          </a:prstGeom>
+          <a:noFill/>
+        </p:spPr>
+        <p:txBody>
+          <a:bodyPr wrap="square">
+            <a:spAutoFit/>
+          </a:bodyPr>
+          <a:lstStyle/>
+          <a:p>
+            <a:r>
+              <a:rPr lang="fr-FR" sz="3600" dirty="0" err="1">
+                <a:solidFill>
+                  <a:srgbClr val="4758AB"/>
+                </a:solidFill>
+                <a:latin typeface="Courier"/>
+              </a:rPr>
+              <a:t>ggplot</a:t>
+            </a:r>
+            <a:r>
+              <a:rPr lang="fr-FR" sz="3600" dirty="0">
+                <a:solidFill>
+                  <a:srgbClr val="003B4F"/>
+                </a:solidFill>
+                <a:latin typeface="Courier"/>
+              </a:rPr>
+              <a:t>(</a:t>
+            </a:r>
+            <a:r>
+              <a:rPr lang="fr-FR" sz="3600" dirty="0" err="1">
+                <a:solidFill>
+                  <a:srgbClr val="4758AB"/>
+                </a:solidFill>
+                <a:latin typeface="Courier"/>
+              </a:rPr>
+              <a:t>aes</a:t>
+            </a:r>
+            <a:r>
+              <a:rPr lang="fr-FR" sz="3600" dirty="0">
+                <a:solidFill>
+                  <a:srgbClr val="003B4F"/>
+                </a:solidFill>
+                <a:latin typeface="Courier"/>
+              </a:rPr>
+              <a:t>(</a:t>
+            </a:r>
+            <a:r>
+              <a:rPr lang="fr-FR" sz="3600" dirty="0">
+                <a:solidFill>
+                  <a:srgbClr val="657422"/>
+                </a:solidFill>
+                <a:latin typeface="Courier"/>
+              </a:rPr>
+              <a:t>x = </a:t>
+            </a:r>
+            <a:r>
+              <a:rPr lang="fr-FR" sz="3600" dirty="0">
+                <a:solidFill>
+                  <a:srgbClr val="003B4F"/>
+                </a:solidFill>
+                <a:latin typeface="Courier"/>
+              </a:rPr>
+              <a:t>id, </a:t>
+            </a:r>
+            <a:r>
+              <a:rPr lang="fr-FR" sz="3600" dirty="0" err="1">
+                <a:solidFill>
+                  <a:srgbClr val="657422"/>
+                </a:solidFill>
+                <a:latin typeface="Courier"/>
+              </a:rPr>
+              <a:t>fill</a:t>
+            </a:r>
+            <a:r>
+              <a:rPr lang="fr-FR" sz="3600" dirty="0">
+                <a:solidFill>
+                  <a:srgbClr val="657422"/>
+                </a:solidFill>
+                <a:latin typeface="Courier"/>
+              </a:rPr>
+              <a:t> =</a:t>
+            </a:r>
+            <a:r>
+              <a:rPr lang="fr-FR" sz="3600" dirty="0">
+                <a:solidFill>
+                  <a:srgbClr val="003B4F"/>
+                </a:solidFill>
+                <a:latin typeface="Courier"/>
+              </a:rPr>
+              <a:t> id)) </a:t>
+            </a:r>
+            <a:r>
+              <a:rPr lang="fr-FR" sz="3600" dirty="0">
+                <a:solidFill>
+                  <a:srgbClr val="5E5E5E"/>
+                </a:solidFill>
+                <a:latin typeface="Courier"/>
+              </a:rPr>
+              <a:t>+</a:t>
+            </a:r>
+            <a:r>
+              <a:rPr lang="fr-FR" sz="3600" dirty="0">
+                <a:solidFill>
+                  <a:srgbClr val="003B4F"/>
+                </a:solidFill>
+                <a:latin typeface="Courier"/>
+              </a:rPr>
+              <a:t> </a:t>
+            </a:r>
+            <a:endParaRPr lang="fr-FR" sz="3600" dirty="0"/>
+          </a:p>
+        </p:txBody>
+      </p:sp>
+      <p:sp>
+        <p:nvSpPr>
+          <p:cNvPr id="13" name="ZoneTexte 12">
+            <a:extLst>
+              <a:ext uri="{FF2B5EF4-FFF2-40B4-BE49-F238E27FC236}">
+                <a16:creationId xmlns:a16="http://schemas.microsoft.com/office/drawing/2014/main" id="{4D2EC2EE-4973-AF74-463D-269E0801323B}"/>
+              </a:ext>
+            </a:extLst>
+          </p:cNvPr>
+          <p:cNvSpPr txBox="1"/>
+          <p:nvPr/>
+        </p:nvSpPr>
+        <p:spPr>
+          <a:xfrm>
+            <a:off x="2381765" y="4142604"/>
+            <a:ext cx="6098058" cy="646331"/>
+          </a:xfrm>
+          <a:prstGeom prst="rect">
+            <a:avLst/>
+          </a:prstGeom>
+          <a:noFill/>
+        </p:spPr>
+        <p:txBody>
+          <a:bodyPr wrap="square">
+            <a:spAutoFit/>
+          </a:bodyPr>
+          <a:lstStyle/>
+          <a:p>
+            <a:r>
+              <a:rPr lang="fr-FR" sz="3600" dirty="0" err="1">
+                <a:solidFill>
+                  <a:srgbClr val="4758AB"/>
+                </a:solidFill>
+                <a:latin typeface="Courier"/>
+              </a:rPr>
+              <a:t>geom_bar</a:t>
+            </a:r>
+            <a:r>
+              <a:rPr lang="fr-FR" sz="3600" dirty="0">
+                <a:solidFill>
+                  <a:srgbClr val="003B4F"/>
+                </a:solidFill>
+                <a:latin typeface="Courier"/>
+              </a:rPr>
+              <a:t>()</a:t>
+            </a:r>
+            <a:endParaRPr lang="fr-FR" sz="3600" dirty="0"/>
+          </a:p>
+        </p:txBody>
+      </p:sp>
+      <p:sp>
+        <p:nvSpPr>
+          <p:cNvPr id="16" name="Ellipse 15">
+            <a:extLst>
+              <a:ext uri="{FF2B5EF4-FFF2-40B4-BE49-F238E27FC236}">
+                <a16:creationId xmlns:a16="http://schemas.microsoft.com/office/drawing/2014/main" id="{BC2F46D4-0EBB-0B9D-08C0-AFA16DFAFA64}"/>
+              </a:ext>
+            </a:extLst>
+          </p:cNvPr>
+          <p:cNvSpPr/>
+          <p:nvPr/>
+        </p:nvSpPr>
+        <p:spPr>
+          <a:xfrm>
+            <a:off x="10692713" y="3208639"/>
+            <a:ext cx="852616" cy="852616"/>
+          </a:xfrm>
+          <a:custGeom>
+            <a:avLst/>
+            <a:gdLst>
+              <a:gd name="connsiteX0" fmla="*/ 0 w 852616"/>
+              <a:gd name="connsiteY0" fmla="*/ 426308 h 852616"/>
+              <a:gd name="connsiteX1" fmla="*/ 426308 w 852616"/>
+              <a:gd name="connsiteY1" fmla="*/ 0 h 852616"/>
+              <a:gd name="connsiteX2" fmla="*/ 852616 w 852616"/>
+              <a:gd name="connsiteY2" fmla="*/ 426308 h 852616"/>
+              <a:gd name="connsiteX3" fmla="*/ 426308 w 852616"/>
+              <a:gd name="connsiteY3" fmla="*/ 852616 h 852616"/>
+              <a:gd name="connsiteX4" fmla="*/ 0 w 852616"/>
+              <a:gd name="connsiteY4" fmla="*/ 426308 h 852616"/>
+            </a:gdLst>
+            <a:ahLst/>
+            <a:cxnLst>
+              <a:cxn ang="0">
+                <a:pos x="connsiteX0" y="connsiteY0"/>
+              </a:cxn>
+              <a:cxn ang="0">
+                <a:pos x="connsiteX1" y="connsiteY1"/>
+              </a:cxn>
+              <a:cxn ang="0">
+                <a:pos x="connsiteX2" y="connsiteY2"/>
+              </a:cxn>
+              <a:cxn ang="0">
+                <a:pos x="connsiteX3" y="connsiteY3"/>
+              </a:cxn>
+              <a:cxn ang="0">
+                <a:pos x="connsiteX4" y="connsiteY4"/>
+              </a:cxn>
+            </a:cxnLst>
+            <a:rect l="l" t="t" r="r" b="b"/>
+            <a:pathLst>
+              <a:path w="852616" h="852616" extrusionOk="0">
+                <a:moveTo>
+                  <a:pt x="0" y="426308"/>
+                </a:moveTo>
+                <a:cubicBezTo>
+                  <a:pt x="-58118" y="155017"/>
+                  <a:pt x="185425" y="2042"/>
+                  <a:pt x="426308" y="0"/>
+                </a:cubicBezTo>
+                <a:cubicBezTo>
+                  <a:pt x="676463" y="3097"/>
+                  <a:pt x="837718" y="191339"/>
+                  <a:pt x="852616" y="426308"/>
+                </a:cubicBezTo>
+                <a:cubicBezTo>
+                  <a:pt x="812949" y="700488"/>
+                  <a:pt x="650193" y="916499"/>
+                  <a:pt x="426308" y="852616"/>
+                </a:cubicBezTo>
+                <a:cubicBezTo>
+                  <a:pt x="152850" y="831817"/>
+                  <a:pt x="43953" y="682752"/>
+                  <a:pt x="0" y="426308"/>
+                </a:cubicBezTo>
+                <a:close/>
+              </a:path>
+            </a:pathLst>
+          </a:custGeom>
+          <a:noFill/>
+          <a:ln w="82550" cap="rnd" cmpd="dbl">
+            <a:solidFill>
+              <a:srgbClr val="FF0000"/>
+            </a:solidFill>
+            <a:prstDash val="sysDot"/>
+            <a:round/>
+            <a:extLst>
+              <a:ext uri="{C807C97D-BFC1-408E-A445-0C87EB9F89A2}">
+                <ask:lineSketchStyleProps xmlns:ask="http://schemas.microsoft.com/office/drawing/2018/sketchyshapes" sd="1219033472">
+                  <a:prstGeom prst="ellipse">
+                    <a:avLst/>
+                  </a:prstGeom>
+                  <ask:type>
+                    <ask:lineSketchScribble/>
+                  </ask:type>
+                </ask:lineSketchStyleProps>
+              </a:ext>
+            </a:extLst>
+          </a:ln>
+        </p:spPr>
+        <p:style>
+          <a:lnRef idx="2">
+            <a:schemeClr val="accent2"/>
+          </a:lnRef>
+          <a:fillRef idx="1">
+            <a:schemeClr val="lt1"/>
+          </a:fillRef>
+          <a:effectRef idx="0">
+            <a:schemeClr val="accent2"/>
+          </a:effectRef>
+          <a:fontRef idx="minor">
+            <a:schemeClr val="dk1"/>
+          </a:fontRef>
+        </p:style>
+        <p:txBody>
+          <a:bodyPr rtlCol="0" anchor="ctr"/>
+          <a:lstStyle/>
+          <a:p>
+            <a:pPr algn="ctr"/>
+            <a:endParaRPr lang="fr-FR"/>
+          </a:p>
+        </p:txBody>
+      </p:sp>
+      <p:sp>
+        <p:nvSpPr>
+          <p:cNvPr id="17" name="Légende encadrée 2 16">
+            <a:extLst>
+              <a:ext uri="{FF2B5EF4-FFF2-40B4-BE49-F238E27FC236}">
+                <a16:creationId xmlns:a16="http://schemas.microsoft.com/office/drawing/2014/main" id="{D7316984-F354-F965-4724-1681E9361076}"/>
+              </a:ext>
+            </a:extLst>
+          </p:cNvPr>
+          <p:cNvSpPr/>
+          <p:nvPr/>
+        </p:nvSpPr>
+        <p:spPr>
+          <a:xfrm>
+            <a:off x="4386648" y="5152767"/>
+            <a:ext cx="1458098" cy="612648"/>
+          </a:xfrm>
+          <a:prstGeom prst="borderCallout2">
+            <a:avLst>
+              <a:gd name="adj1" fmla="val 18750"/>
+              <a:gd name="adj2" fmla="val -8333"/>
+              <a:gd name="adj3" fmla="val 20767"/>
+              <a:gd name="adj4" fmla="val -38289"/>
+              <a:gd name="adj5" fmla="val -62974"/>
+              <a:gd name="adj6" fmla="val -46667"/>
+            </a:avLst>
+          </a:prstGeom>
+        </p:spPr>
+        <p:style>
+          <a:lnRef idx="2">
+            <a:schemeClr val="accent1">
+              <a:shade val="15000"/>
+            </a:schemeClr>
+          </a:lnRef>
+          <a:fillRef idx="1">
+            <a:schemeClr val="accent1"/>
+          </a:fillRef>
+          <a:effectRef idx="0">
+            <a:schemeClr val="accent1"/>
+          </a:effectRef>
+          <a:fontRef idx="minor">
+            <a:schemeClr val="lt1"/>
+          </a:fontRef>
+        </p:style>
+        <p:txBody>
+          <a:bodyPr rtlCol="0" anchor="ctr"/>
+          <a:lstStyle/>
+          <a:p>
+            <a:pPr algn="ctr"/>
+            <a:r>
+              <a:rPr lang="fr-FR" dirty="0" err="1"/>
+              <a:t>Geometry</a:t>
+            </a:r>
+            <a:endParaRPr lang="fr-FR" dirty="0"/>
+          </a:p>
+        </p:txBody>
+      </p:sp>
+    </p:spTree>
+    <p:extLst>
+      <p:ext uri="{BB962C8B-B14F-4D97-AF65-F5344CB8AC3E}">
+        <p14:creationId xmlns:p14="http://schemas.microsoft.com/office/powerpoint/2010/main" val="920239293"/>
+      </p:ext>
+    </p:extLst>
+  </p:cSld>
+  <p:clrMapOvr>
+    <a:masterClrMapping/>
+  </p:clrMapOvr>
+  <p:timing>
+    <p:tnLst>
+      <p:par>
+        <p:cTn id="1" dur="indefinite" restart="never" nodeType="tmRoot">
+          <p:childTnLst>
+            <p:seq concurrent="1" nextAc="seek">
+              <p:cTn id="2" dur="indefinite" nodeType="mainSeq">
+                <p:childTnLst>
+                  <p:par>
+                    <p:cTn id="3" fill="hold">
+                      <p:stCondLst>
+                        <p:cond delay="indefinite"/>
+                      </p:stCondLst>
+                      <p:childTnLst>
+                        <p:par>
+                          <p:cTn id="4" fill="hold">
+                            <p:stCondLst>
+                              <p:cond delay="0"/>
+                            </p:stCondLst>
+                            <p:childTnLst>
+                              <p:par>
+                                <p:cTn id="5" presetID="1" presetClass="entr" presetSubtype="0" fill="hold" grpId="0" nodeType="clickEffect">
+                                  <p:stCondLst>
+                                    <p:cond delay="0"/>
+                                  </p:stCondLst>
+                                  <p:childTnLst>
+                                    <p:set>
+                                      <p:cBhvr>
+                                        <p:cTn id="6" dur="1" fill="hold">
+                                          <p:stCondLst>
+                                            <p:cond delay="0"/>
+                                          </p:stCondLst>
+                                        </p:cTn>
+                                        <p:tgtEl>
+                                          <p:spTgt spid="9"/>
+                                        </p:tgtEl>
+                                        <p:attrNameLst>
+                                          <p:attrName>style.visibility</p:attrName>
+                                        </p:attrNameLst>
+                                      </p:cBhvr>
+                                      <p:to>
+                                        <p:strVal val="visible"/>
+                                      </p:to>
+                                    </p:set>
+                                  </p:childTnLst>
+                                </p:cTn>
+                              </p:par>
+                            </p:childTnLst>
+                          </p:cTn>
+                        </p:par>
+                      </p:childTnLst>
+                    </p:cTn>
+                  </p:par>
+                  <p:par>
+                    <p:cTn id="7" fill="hold">
+                      <p:stCondLst>
+                        <p:cond delay="indefinite"/>
+                      </p:stCondLst>
+                      <p:childTnLst>
+                        <p:par>
+                          <p:cTn id="8" fill="hold">
+                            <p:stCondLst>
+                              <p:cond delay="0"/>
+                            </p:stCondLst>
+                            <p:childTnLst>
+                              <p:par>
+                                <p:cTn id="9" presetID="1" presetClass="entr" presetSubtype="0" fill="hold" grpId="1" nodeType="clickEffect">
+                                  <p:stCondLst>
+                                    <p:cond delay="0"/>
+                                  </p:stCondLst>
+                                  <p:childTnLst>
+                                    <p:set>
+                                      <p:cBhvr>
+                                        <p:cTn id="10" dur="1" fill="hold">
+                                          <p:stCondLst>
+                                            <p:cond delay="0"/>
+                                          </p:stCondLst>
+                                        </p:cTn>
+                                        <p:tgtEl>
+                                          <p:spTgt spid="5"/>
+                                        </p:tgtEl>
+                                        <p:attrNameLst>
+                                          <p:attrName>style.visibility</p:attrName>
+                                        </p:attrNameLst>
+                                      </p:cBhvr>
+                                      <p:to>
+                                        <p:strVal val="visible"/>
+                                      </p:to>
+                                    </p:set>
+                                  </p:childTnLst>
+                                </p:cTn>
+                              </p:par>
+                            </p:childTnLst>
+                          </p:cTn>
+                        </p:par>
+                      </p:childTnLst>
+                    </p:cTn>
+                  </p:par>
+                  <p:par>
+                    <p:cTn id="11" fill="hold">
+                      <p:stCondLst>
+                        <p:cond delay="indefinite"/>
+                      </p:stCondLst>
+                      <p:childTnLst>
+                        <p:par>
+                          <p:cTn id="12" fill="hold">
+                            <p:stCondLst>
+                              <p:cond delay="0"/>
+                            </p:stCondLst>
+                            <p:childTnLst>
+                              <p:par>
+                                <p:cTn id="13" presetID="1" presetClass="exit" presetSubtype="0" fill="hold" grpId="0" nodeType="clickEffect">
+                                  <p:stCondLst>
+                                    <p:cond delay="0"/>
+                                  </p:stCondLst>
+                                  <p:childTnLst>
+                                    <p:set>
+                                      <p:cBhvr>
+                                        <p:cTn id="14" dur="1" fill="hold">
+                                          <p:stCondLst>
+                                            <p:cond delay="0"/>
+                                          </p:stCondLst>
+                                        </p:cTn>
+                                        <p:tgtEl>
+                                          <p:spTgt spid="5"/>
+                                        </p:tgtEl>
+                                        <p:attrNameLst>
+                                          <p:attrName>style.visibility</p:attrName>
+                                        </p:attrNameLst>
+                                      </p:cBhvr>
+                                      <p:to>
+                                        <p:strVal val="hidden"/>
+                                      </p:to>
+                                    </p:set>
+                                  </p:childTnLst>
+                                </p:cTn>
+                              </p:par>
+                            </p:childTnLst>
+                          </p:cTn>
+                        </p:par>
+                      </p:childTnLst>
+                    </p:cTn>
+                  </p:par>
+                  <p:par>
+                    <p:cTn id="15" fill="hold">
+                      <p:stCondLst>
+                        <p:cond delay="indefinite"/>
+                      </p:stCondLst>
+                      <p:childTnLst>
+                        <p:par>
+                          <p:cTn id="16" fill="hold">
+                            <p:stCondLst>
+                              <p:cond delay="0"/>
+                            </p:stCondLst>
+                            <p:childTnLst>
+                              <p:par>
+                                <p:cTn id="17" presetID="1" presetClass="entr" presetSubtype="0" fill="hold" grpId="0" nodeType="clickEffect">
+                                  <p:stCondLst>
+                                    <p:cond delay="0"/>
+                                  </p:stCondLst>
+                                  <p:childTnLst>
+                                    <p:set>
+                                      <p:cBhvr>
+                                        <p:cTn id="18" dur="1" fill="hold">
+                                          <p:stCondLst>
+                                            <p:cond delay="0"/>
+                                          </p:stCondLst>
+                                        </p:cTn>
+                                        <p:tgtEl>
+                                          <p:spTgt spid="11"/>
+                                        </p:tgtEl>
+                                        <p:attrNameLst>
+                                          <p:attrName>style.visibility</p:attrName>
+                                        </p:attrNameLst>
+                                      </p:cBhvr>
+                                      <p:to>
+                                        <p:strVal val="visible"/>
+                                      </p:to>
+                                    </p:set>
+                                  </p:childTnLst>
+                                </p:cTn>
+                              </p:par>
+                            </p:childTnLst>
+                          </p:cTn>
+                        </p:par>
+                      </p:childTnLst>
+                    </p:cTn>
+                  </p:par>
+                  <p:par>
+                    <p:cTn id="19" fill="hold">
+                      <p:stCondLst>
+                        <p:cond delay="indefinite"/>
+                      </p:stCondLst>
+                      <p:childTnLst>
+                        <p:par>
+                          <p:cTn id="20" fill="hold">
+                            <p:stCondLst>
+                              <p:cond delay="0"/>
+                            </p:stCondLst>
+                            <p:childTnLst>
+                              <p:par>
+                                <p:cTn id="21" presetID="1" presetClass="entr" presetSubtype="0" fill="hold" grpId="1" nodeType="clickEffect">
+                                  <p:stCondLst>
+                                    <p:cond delay="0"/>
+                                  </p:stCondLst>
+                                  <p:childTnLst>
+                                    <p:set>
+                                      <p:cBhvr>
+                                        <p:cTn id="22" dur="1" fill="hold">
+                                          <p:stCondLst>
+                                            <p:cond delay="0"/>
+                                          </p:stCondLst>
+                                        </p:cTn>
+                                        <p:tgtEl>
+                                          <p:spTgt spid="7"/>
+                                        </p:tgtEl>
+                                        <p:attrNameLst>
+                                          <p:attrName>style.visibility</p:attrName>
+                                        </p:attrNameLst>
+                                      </p:cBhvr>
+                                      <p:to>
+                                        <p:strVal val="visible"/>
+                                      </p:to>
+                                    </p:set>
+                                  </p:childTnLst>
+                                </p:cTn>
+                              </p:par>
+                              <p:par>
+                                <p:cTn id="23" presetID="1" presetClass="entr" presetSubtype="0" fill="hold" grpId="1" nodeType="withEffect">
+                                  <p:stCondLst>
+                                    <p:cond delay="0"/>
+                                  </p:stCondLst>
+                                  <p:childTnLst>
+                                    <p:set>
+                                      <p:cBhvr>
+                                        <p:cTn id="24" dur="1" fill="hold">
+                                          <p:stCondLst>
+                                            <p:cond delay="0"/>
+                                          </p:stCondLst>
+                                        </p:cTn>
+                                        <p:tgtEl>
+                                          <p:spTgt spid="6"/>
+                                        </p:tgtEl>
+                                        <p:attrNameLst>
+                                          <p:attrName>style.visibility</p:attrName>
+                                        </p:attrNameLst>
+                                      </p:cBhvr>
+                                      <p:to>
+                                        <p:strVal val="visible"/>
+                                      </p:to>
+                                    </p:set>
+                                  </p:childTnLst>
+                                </p:cTn>
+                              </p:par>
+                            </p:childTnLst>
+                          </p:cTn>
+                        </p:par>
+                      </p:childTnLst>
+                    </p:cTn>
+                  </p:par>
+                  <p:par>
+                    <p:cTn id="25" fill="hold">
+                      <p:stCondLst>
+                        <p:cond delay="indefinite"/>
+                      </p:stCondLst>
+                      <p:childTnLst>
+                        <p:par>
+                          <p:cTn id="26" fill="hold">
+                            <p:stCondLst>
+                              <p:cond delay="0"/>
+                            </p:stCondLst>
+                            <p:childTnLst>
+                              <p:par>
+                                <p:cTn id="27" presetID="1" presetClass="exit" presetSubtype="0" fill="hold" grpId="0" nodeType="clickEffect">
+                                  <p:stCondLst>
+                                    <p:cond delay="0"/>
+                                  </p:stCondLst>
+                                  <p:childTnLst>
+                                    <p:set>
+                                      <p:cBhvr>
+                                        <p:cTn id="28" dur="1" fill="hold">
+                                          <p:stCondLst>
+                                            <p:cond delay="0"/>
+                                          </p:stCondLst>
+                                        </p:cTn>
+                                        <p:tgtEl>
+                                          <p:spTgt spid="7"/>
+                                        </p:tgtEl>
+                                        <p:attrNameLst>
+                                          <p:attrName>style.visibility</p:attrName>
+                                        </p:attrNameLst>
+                                      </p:cBhvr>
+                                      <p:to>
+                                        <p:strVal val="hidden"/>
+                                      </p:to>
+                                    </p:set>
+                                  </p:childTnLst>
+                                </p:cTn>
+                              </p:par>
+                              <p:par>
+                                <p:cTn id="29" presetID="1" presetClass="exit" presetSubtype="0" fill="hold" grpId="0" nodeType="withEffect">
+                                  <p:stCondLst>
+                                    <p:cond delay="0"/>
+                                  </p:stCondLst>
+                                  <p:childTnLst>
+                                    <p:set>
+                                      <p:cBhvr>
+                                        <p:cTn id="30" dur="1" fill="hold">
+                                          <p:stCondLst>
+                                            <p:cond delay="0"/>
+                                          </p:stCondLst>
+                                        </p:cTn>
+                                        <p:tgtEl>
+                                          <p:spTgt spid="6"/>
+                                        </p:tgtEl>
+                                        <p:attrNameLst>
+                                          <p:attrName>style.visibility</p:attrName>
+                                        </p:attrNameLst>
+                                      </p:cBhvr>
+                                      <p:to>
+                                        <p:strVal val="hidden"/>
+                                      </p:to>
+                                    </p:set>
+                                  </p:childTnLst>
+                                </p:cTn>
+                              </p:par>
+                            </p:childTnLst>
+                          </p:cTn>
+                        </p:par>
+                      </p:childTnLst>
+                    </p:cTn>
+                  </p:par>
+                  <p:par>
+                    <p:cTn id="31" fill="hold">
+                      <p:stCondLst>
+                        <p:cond delay="indefinite"/>
+                      </p:stCondLst>
+                      <p:childTnLst>
+                        <p:par>
+                          <p:cTn id="32" fill="hold">
+                            <p:stCondLst>
+                              <p:cond delay="0"/>
+                            </p:stCondLst>
+                            <p:childTnLst>
+                              <p:par>
+                                <p:cTn id="33" presetID="1" presetClass="entr" presetSubtype="0" fill="hold" grpId="0" nodeType="clickEffect">
+                                  <p:stCondLst>
+                                    <p:cond delay="0"/>
+                                  </p:stCondLst>
+                                  <p:childTnLst>
+                                    <p:set>
+                                      <p:cBhvr>
+                                        <p:cTn id="34" dur="1" fill="hold">
+                                          <p:stCondLst>
+                                            <p:cond delay="0"/>
+                                          </p:stCondLst>
+                                        </p:cTn>
+                                        <p:tgtEl>
+                                          <p:spTgt spid="16"/>
+                                        </p:tgtEl>
+                                        <p:attrNameLst>
+                                          <p:attrName>style.visibility</p:attrName>
+                                        </p:attrNameLst>
+                                      </p:cBhvr>
+                                      <p:to>
+                                        <p:strVal val="visible"/>
+                                      </p:to>
+                                    </p:set>
+                                  </p:childTnLst>
+                                </p:cTn>
+                              </p:par>
+                            </p:childTnLst>
+                          </p:cTn>
+                        </p:par>
+                      </p:childTnLst>
+                    </p:cTn>
+                  </p:par>
+                  <p:par>
+                    <p:cTn id="35" fill="hold">
+                      <p:stCondLst>
+                        <p:cond delay="indefinite"/>
+                      </p:stCondLst>
+                      <p:childTnLst>
+                        <p:par>
+                          <p:cTn id="36" fill="hold">
+                            <p:stCondLst>
+                              <p:cond delay="0"/>
+                            </p:stCondLst>
+                            <p:childTnLst>
+                              <p:par>
+                                <p:cTn id="37" presetID="1" presetClass="exit" presetSubtype="0" fill="hold" grpId="1" nodeType="clickEffect">
+                                  <p:stCondLst>
+                                    <p:cond delay="0"/>
+                                  </p:stCondLst>
+                                  <p:childTnLst>
+                                    <p:set>
+                                      <p:cBhvr>
+                                        <p:cTn id="38" dur="1" fill="hold">
+                                          <p:stCondLst>
+                                            <p:cond delay="0"/>
+                                          </p:stCondLst>
+                                        </p:cTn>
+                                        <p:tgtEl>
+                                          <p:spTgt spid="16"/>
+                                        </p:tgtEl>
+                                        <p:attrNameLst>
+                                          <p:attrName>style.visibility</p:attrName>
+                                        </p:attrNameLst>
+                                      </p:cBhvr>
+                                      <p:to>
+                                        <p:strVal val="hidden"/>
+                                      </p:to>
+                                    </p:set>
+                                  </p:childTnLst>
+                                </p:cTn>
+                              </p:par>
+                            </p:childTnLst>
+                          </p:cTn>
+                        </p:par>
+                      </p:childTnLst>
+                    </p:cTn>
+                  </p:par>
+                  <p:par>
+                    <p:cTn id="39" fill="hold">
+                      <p:stCondLst>
+                        <p:cond delay="indefinite"/>
+                      </p:stCondLst>
+                      <p:childTnLst>
+                        <p:par>
+                          <p:cTn id="40" fill="hold">
+                            <p:stCondLst>
+                              <p:cond delay="0"/>
+                            </p:stCondLst>
+                            <p:childTnLst>
+                              <p:par>
+                                <p:cTn id="41" presetID="1" presetClass="entr" presetSubtype="0" fill="hold" grpId="0" nodeType="clickEffect">
+                                  <p:stCondLst>
+                                    <p:cond delay="0"/>
+                                  </p:stCondLst>
+                                  <p:childTnLst>
+                                    <p:set>
+                                      <p:cBhvr>
+                                        <p:cTn id="42" dur="1" fill="hold">
+                                          <p:stCondLst>
+                                            <p:cond delay="0"/>
+                                          </p:stCondLst>
+                                        </p:cTn>
+                                        <p:tgtEl>
+                                          <p:spTgt spid="13"/>
+                                        </p:tgtEl>
+                                        <p:attrNameLst>
+                                          <p:attrName>style.visibility</p:attrName>
+                                        </p:attrNameLst>
+                                      </p:cBhvr>
+                                      <p:to>
+                                        <p:strVal val="visible"/>
+                                      </p:to>
+                                    </p:set>
+                                  </p:childTnLst>
+                                </p:cTn>
+                              </p:par>
+                            </p:childTnLst>
+                          </p:cTn>
+                        </p:par>
+                      </p:childTnLst>
+                    </p:cTn>
+                  </p:par>
+                  <p:par>
+                    <p:cTn id="43" fill="hold">
+                      <p:stCondLst>
+                        <p:cond delay="indefinite"/>
+                      </p:stCondLst>
+                      <p:childTnLst>
+                        <p:par>
+                          <p:cTn id="44" fill="hold">
+                            <p:stCondLst>
+                              <p:cond delay="0"/>
+                            </p:stCondLst>
+                            <p:childTnLst>
+                              <p:par>
+                                <p:cTn id="45" presetID="1" presetClass="entr" presetSubtype="0" fill="hold" grpId="0" nodeType="clickEffect">
+                                  <p:stCondLst>
+                                    <p:cond delay="0"/>
+                                  </p:stCondLst>
+                                  <p:childTnLst>
+                                    <p:set>
+                                      <p:cBhvr>
+                                        <p:cTn id="46" dur="1" fill="hold">
+                                          <p:stCondLst>
+                                            <p:cond delay="0"/>
+                                          </p:stCondLst>
+                                        </p:cTn>
+                                        <p:tgtEl>
+                                          <p:spTgt spid="17"/>
+                                        </p:tgtEl>
+                                        <p:attrNameLst>
+                                          <p:attrName>style.visibility</p:attrName>
+                                        </p:attrNameLst>
+                                      </p:cBhvr>
+                                      <p:to>
+                                        <p:strVal val="visible"/>
+                                      </p:to>
+                                    </p:set>
+                                  </p:childTnLst>
+                                </p:cTn>
+                              </p:par>
+                            </p:childTnLst>
+                          </p:cTn>
+                        </p:par>
+                      </p:childTnLst>
+                    </p:cTn>
+                  </p:par>
+                  <p:par>
+                    <p:cTn id="47" fill="hold">
+                      <p:stCondLst>
+                        <p:cond delay="indefinite"/>
+                      </p:stCondLst>
+                      <p:childTnLst>
+                        <p:par>
+                          <p:cTn id="48" fill="hold">
+                            <p:stCondLst>
+                              <p:cond delay="0"/>
+                            </p:stCondLst>
+                            <p:childTnLst>
+                              <p:par>
+                                <p:cTn id="49" presetID="1" presetClass="exit" presetSubtype="0" fill="hold" grpId="1" nodeType="clickEffect">
+                                  <p:stCondLst>
+                                    <p:cond delay="0"/>
+                                  </p:stCondLst>
+                                  <p:childTnLst>
+                                    <p:set>
+                                      <p:cBhvr>
+                                        <p:cTn id="50" dur="1" fill="hold">
+                                          <p:stCondLst>
+                                            <p:cond delay="0"/>
+                                          </p:stCondLst>
+                                        </p:cTn>
+                                        <p:tgtEl>
+                                          <p:spTgt spid="17"/>
+                                        </p:tgtEl>
+                                        <p:attrNameLst>
+                                          <p:attrName>style.visibility</p:attrName>
+                                        </p:attrNameLst>
+                                      </p:cBhvr>
+                                      <p:to>
+                                        <p:strVal val="hidden"/>
+                                      </p:to>
+                                    </p:set>
+                                  </p:childTnLst>
+                                </p:cTn>
+                              </p:par>
+                            </p:childTnLst>
+                          </p:cTn>
+                        </p:par>
+                        <p:par>
+                          <p:cTn id="51" fill="hold">
+                            <p:stCondLst>
+                              <p:cond delay="0"/>
+                            </p:stCondLst>
+                            <p:childTnLst>
+                              <p:par>
+                                <p:cTn id="52" presetID="19" presetClass="entr" presetSubtype="10" repeatCount="indefinite" fill="hold" grpId="3" nodeType="afterEffect">
+                                  <p:stCondLst>
+                                    <p:cond delay="2500"/>
+                                  </p:stCondLst>
+                                  <p:childTnLst>
+                                    <p:set>
+                                      <p:cBhvr>
+                                        <p:cTn id="53" dur="1" fill="hold">
+                                          <p:stCondLst>
+                                            <p:cond delay="0"/>
+                                          </p:stCondLst>
+                                        </p:cTn>
+                                        <p:tgtEl>
+                                          <p:spTgt spid="16"/>
+                                        </p:tgtEl>
+                                        <p:attrNameLst>
+                                          <p:attrName>style.visibility</p:attrName>
+                                        </p:attrNameLst>
+                                      </p:cBhvr>
+                                      <p:to>
+                                        <p:strVal val="visible"/>
+                                      </p:to>
+                                    </p:set>
+                                    <p:anim calcmode="lin" valueType="num">
+                                      <p:cBhvr>
+                                        <p:cTn id="54" dur="3000" fill="hold"/>
+                                        <p:tgtEl>
+                                          <p:spTgt spid="16"/>
+                                        </p:tgtEl>
+                                        <p:attrNameLst>
+                                          <p:attrName>ppt_w</p:attrName>
+                                        </p:attrNameLst>
+                                      </p:cBhvr>
+                                      <p:tavLst>
+                                        <p:tav tm="0" fmla="#ppt_w*sin(2.5*pi*$)">
+                                          <p:val>
+                                            <p:fltVal val="0"/>
+                                          </p:val>
+                                        </p:tav>
+                                        <p:tav tm="100000">
+                                          <p:val>
+                                            <p:fltVal val="1"/>
+                                          </p:val>
+                                        </p:tav>
+                                      </p:tavLst>
+                                    </p:anim>
+                                    <p:anim calcmode="lin" valueType="num">
+                                      <p:cBhvr>
+                                        <p:cTn id="55" dur="3000" fill="hold"/>
+                                        <p:tgtEl>
+                                          <p:spTgt spid="16"/>
+                                        </p:tgtEl>
+                                        <p:attrNameLst>
+                                          <p:attrName>ppt_h</p:attrName>
+                                        </p:attrNameLst>
+                                      </p:cBhvr>
+                                      <p:tavLst>
+                                        <p:tav tm="0">
+                                          <p:val>
+                                            <p:strVal val="#ppt_h"/>
+                                          </p:val>
+                                        </p:tav>
+                                        <p:tav tm="100000">
+                                          <p:val>
+                                            <p:strVal val="#ppt_h"/>
+                                          </p:val>
+                                        </p:tav>
+                                      </p:tavLst>
+                                    </p:anim>
+                                  </p:childTnLst>
+                                </p:cTn>
+                              </p:par>
+                            </p:childTnLst>
+                          </p:cTn>
+                        </p:par>
+                      </p:childTnLst>
+                    </p:cTn>
+                  </p:par>
+                </p:childTnLst>
+              </p:cTn>
+              <p:prevCondLst>
+                <p:cond evt="onPrev" delay="0">
+                  <p:tgtEl>
+                    <p:sldTgt/>
+                  </p:tgtEl>
+                </p:cond>
+              </p:prevCondLst>
+              <p:nextCondLst>
+                <p:cond evt="onNext" delay="0">
+                  <p:tgtEl>
+                    <p:sldTgt/>
+                  </p:tgtEl>
+                </p:cond>
+              </p:nextCondLst>
+            </p:seq>
+          </p:childTnLst>
+        </p:cTn>
+      </p:par>
+    </p:tnLst>
+    <p:bldLst>
+      <p:bldP spid="5" grpId="0" animBg="1"/>
+      <p:bldP spid="5" grpId="1" animBg="1"/>
+      <p:bldP spid="6" grpId="0" animBg="1"/>
+      <p:bldP spid="6" grpId="1" animBg="1"/>
+      <p:bldP spid="7" grpId="0" animBg="1"/>
+      <p:bldP spid="7" grpId="1" animBg="1"/>
+      <p:bldP spid="9" grpId="0"/>
+      <p:bldP spid="11" grpId="0"/>
+      <p:bldP spid="13" grpId="0"/>
+      <p:bldP spid="16" grpId="0" animBg="1"/>
+      <p:bldP spid="16" grpId="1" animBg="1"/>
+      <p:bldP spid="16" grpId="3" animBg="1"/>
+      <p:bldP spid="17" grpId="0" animBg="1"/>
+      <p:bldP spid="17" grpId="1" animBg="1"/>
+    </p:bldLst>
+  </p:timing>
+</p:sld>
+</file>
+
+<file path=ppt/slides/slide8.xml><?xml version="1.0" encoding="utf-8"?>
+<p:sld xmlns:a="http://schemas.openxmlformats.org/drawingml/2006/main" xmlns:r="http://schemas.openxmlformats.org/officeDocument/2006/relationships" xmlns:p="http://schemas.openxmlformats.org/presentationml/2006/main">
+  <p:cSld>
+    <p:spTree>
+      <p:nvGrpSpPr>
+        <p:cNvPr id="1" name=""/>
+        <p:cNvGrpSpPr/>
+        <p:nvPr/>
+      </p:nvGrpSpPr>
+      <p:grpSpPr>
+        <a:xfrm>
+          <a:off x="0" y="0"/>
+          <a:ext cx="0" cy="0"/>
+          <a:chOff x="0" y="0"/>
+          <a:chExt cx="0" cy="0"/>
+        </a:xfrm>
+      </p:grpSpPr>
+      <p:sp>
+        <p:nvSpPr>
+          <p:cNvPr id="2" name="Titre 1">
+            <a:extLst>
+              <a:ext uri="{FF2B5EF4-FFF2-40B4-BE49-F238E27FC236}">
+                <a16:creationId xmlns:a16="http://schemas.microsoft.com/office/drawing/2014/main" id="{50FC1D54-7600-BF78-FCCF-5FA11CCD5C15}"/>
+              </a:ext>
+            </a:extLst>
+          </p:cNvPr>
+          <p:cNvSpPr>
+            <a:spLocks noGrp="1"/>
+          </p:cNvSpPr>
+          <p:nvPr>
+            <p:ph type="title"/>
+          </p:nvPr>
+        </p:nvSpPr>
+        <p:spPr/>
+        <p:txBody>
+          <a:bodyPr/>
+          <a:lstStyle/>
+          <a:p>
+            <a:r>
+              <a:rPr lang="fr-FR" dirty="0" err="1"/>
+              <a:t>Experimenting</a:t>
+            </a:r>
+            <a:r>
+              <a:rPr lang="fr-FR" dirty="0"/>
+              <a:t> </a:t>
+            </a:r>
+            <a:r>
+              <a:rPr lang="fr-FR" dirty="0" err="1"/>
+              <a:t>with</a:t>
+            </a:r>
+            <a:r>
+              <a:rPr lang="fr-FR" dirty="0"/>
+              <a:t> ggplot2</a:t>
+            </a:r>
+          </a:p>
+        </p:txBody>
+      </p:sp>
+      <p:sp>
+        <p:nvSpPr>
+          <p:cNvPr id="3" name="Espace réservé du contenu 2">
+            <a:extLst>
+              <a:ext uri="{FF2B5EF4-FFF2-40B4-BE49-F238E27FC236}">
+                <a16:creationId xmlns:a16="http://schemas.microsoft.com/office/drawing/2014/main" id="{02F97933-CF8E-0798-393F-AB5F1151E940}"/>
+              </a:ext>
+            </a:extLst>
+          </p:cNvPr>
+          <p:cNvSpPr>
+            <a:spLocks noGrp="1"/>
+          </p:cNvSpPr>
+          <p:nvPr>
+            <p:ph idx="1"/>
+          </p:nvPr>
+        </p:nvSpPr>
+        <p:spPr/>
+        <p:txBody>
+          <a:bodyPr/>
+          <a:lstStyle/>
+          <a:p>
+            <a:pPr marL="0" indent="0">
+              <a:buNone/>
+            </a:pPr>
+            <a:r>
+              <a:rPr lang="en-US" noProof="0" dirty="0"/>
+              <a:t>Open the script called “ggplot2_experiment.R”: what does each individual command do?</a:t>
+            </a:r>
+          </a:p>
+        </p:txBody>
+      </p:sp>
+    </p:spTree>
+    <p:extLst>
+      <p:ext uri="{BB962C8B-B14F-4D97-AF65-F5344CB8AC3E}">
+        <p14:creationId xmlns:p14="http://schemas.microsoft.com/office/powerpoint/2010/main" val="1747315954"/>
+      </p:ext>
+    </p:extLst>
+  </p:cSld>
+  <p:clrMapOvr>
+    <a:masterClrMapping/>
+  </p:clrMapOvr>
+</p:sld>
+</file>
+
+<file path=ppt/slides/slide9.xml><?xml version="1.0" encoding="utf-8"?>
+<p:sld xmlns:a="http://schemas.openxmlformats.org/drawingml/2006/main" xmlns:r="http://schemas.openxmlformats.org/officeDocument/2006/relationships" xmlns:p="http://schemas.openxmlformats.org/presentationml/2006/main">
+  <p:cSld>
+    <p:spTree>
+      <p:nvGrpSpPr>
+        <p:cNvPr id="1" name=""/>
+        <p:cNvGrpSpPr/>
+        <p:nvPr/>
+      </p:nvGrpSpPr>
+      <p:grpSpPr>
+        <a:xfrm>
+          <a:off x="0" y="0"/>
+          <a:ext cx="0" cy="0"/>
+          <a:chOff x="0" y="0"/>
+          <a:chExt cx="0" cy="0"/>
+        </a:xfrm>
+      </p:grpSpPr>
+      <p:pic>
+        <p:nvPicPr>
+          <p:cNvPr id="5" name="Image 4">
+            <a:extLst>
+              <a:ext uri="{FF2B5EF4-FFF2-40B4-BE49-F238E27FC236}">
+                <a16:creationId xmlns:a16="http://schemas.microsoft.com/office/drawing/2014/main" id="{533D52D7-7DD7-C983-F3E7-4D370733F007}"/>
+              </a:ext>
+            </a:extLst>
+          </p:cNvPr>
+          <p:cNvPicPr>
+            <a:picLocks noChangeAspect="1"/>
+          </p:cNvPicPr>
+          <p:nvPr/>
+        </p:nvPicPr>
+        <p:blipFill>
+          <a:blip r:embed="rId2"/>
+          <a:stretch>
+            <a:fillRect/>
+          </a:stretch>
+        </p:blipFill>
+        <p:spPr>
+          <a:xfrm>
+            <a:off x="1541517" y="0"/>
+            <a:ext cx="9108966" cy="6858000"/>
+          </a:xfrm>
+          <a:prstGeom prst="rect">
+            <a:avLst/>
+          </a:prstGeom>
+        </p:spPr>
+      </p:pic>
+      <p:sp>
+        <p:nvSpPr>
+          <p:cNvPr id="7" name="ZoneTexte 6">
+            <a:extLst>
+              <a:ext uri="{FF2B5EF4-FFF2-40B4-BE49-F238E27FC236}">
+                <a16:creationId xmlns:a16="http://schemas.microsoft.com/office/drawing/2014/main" id="{9482E867-FC0E-93DB-2D73-50D8A72F78EC}"/>
+              </a:ext>
+            </a:extLst>
+          </p:cNvPr>
+          <p:cNvSpPr txBox="1"/>
+          <p:nvPr/>
+        </p:nvSpPr>
+        <p:spPr>
+          <a:xfrm>
+            <a:off x="0" y="6396335"/>
+            <a:ext cx="1604822" cy="461665"/>
+          </a:xfrm>
+          <a:prstGeom prst="rect">
+            <a:avLst/>
+          </a:prstGeom>
+          <a:noFill/>
+        </p:spPr>
+        <p:txBody>
+          <a:bodyPr wrap="square">
+            <a:spAutoFit/>
+          </a:bodyPr>
+          <a:lstStyle/>
+          <a:p>
+            <a:r>
+              <a:rPr lang="fr-FR" sz="1200" b="0" i="0" u="sng" dirty="0">
+                <a:solidFill>
+                  <a:srgbClr val="0024B0"/>
+                </a:solidFill>
+                <a:effectLst/>
+                <a:latin typeface="ksqy"/>
+                <a:hlinkClick r:id="rId3"/>
+              </a:rPr>
+              <a:t>Artwork by @allison_horst</a:t>
+            </a:r>
+            <a:endParaRPr lang="fr-FR" sz="1200" dirty="0"/>
+          </a:p>
+        </p:txBody>
+      </p:sp>
+    </p:spTree>
+    <p:extLst>
+      <p:ext uri="{BB962C8B-B14F-4D97-AF65-F5344CB8AC3E}">
+        <p14:creationId xmlns:p14="http://schemas.microsoft.com/office/powerpoint/2010/main" val="694262841"/>
       </p:ext>
     </p:extLst>
   </p:cSld>
